--- a/ppt/cold-chain-logistics.pptx
+++ b/ppt/cold-chain-logistics.pptx
@@ -3101,8 +3101,8 @@
         </p:nvSpPr>
         <p:spPr>
           <a:xfrm>
-            <a:off x="0" y="0"/>
-            <a:ext cx="4114800" cy="6858000"/>
+            <a:off x="-91440" y="-91440"/>
+            <a:ext cx="12435840" cy="7040880"/>
           </a:xfrm>
           <a:prstGeom prst="rect">
             <a:avLst/>
@@ -3139,58 +3139,23 @@
       </p:sp>
       <p:sp>
         <p:nvSpPr>
-          <p:cNvPr id="3" name="TextBox 2"/>
-          <p:cNvSpPr txBox="1"/>
+          <p:cNvPr id="3" name="Rectangle 2"/>
+          <p:cNvSpPr/>
           <p:nvPr/>
         </p:nvSpPr>
         <p:spPr>
           <a:xfrm>
-            <a:off x="502920" y="1920240"/>
-            <a:ext cx="3291840" cy="2743200"/>
+            <a:off x="457200" y="457200"/>
+            <a:ext cx="11277295" cy="5943600"/>
           </a:xfrm>
           <a:prstGeom prst="rect">
             <a:avLst/>
           </a:prstGeom>
           <a:noFill/>
-        </p:spPr>
-        <p:txBody>
-          <a:bodyPr wrap="square" anchor="t">
-            <a:spAutoFit/>
-          </a:bodyPr>
-          <a:lstStyle/>
-          <a:p>
-            <a:pPr algn="l"/>
-            <a:r>
-              <a:rPr sz="2700" b="1">
-                <a:solidFill>
-                  <a:srgbClr val="FFFFFF"/>
-                </a:solidFill>
-                <a:latin typeface="Franklin Gothic Medium"/>
-              </a:rPr>
-              <a:t>Cold Chain Logistics Monitoring</a:t>
-            </a:r>
-          </a:p>
-        </p:txBody>
-      </p:sp>
-      <p:sp>
-        <p:nvSpPr>
-          <p:cNvPr id="4" name="Rectangle 3"/>
-          <p:cNvSpPr/>
-          <p:nvPr/>
-        </p:nvSpPr>
-        <p:spPr>
-          <a:xfrm>
-            <a:off x="530352" y="4480560"/>
-            <a:ext cx="1554480" cy="45720"/>
-          </a:xfrm>
-          <a:prstGeom prst="rect">
-            <a:avLst/>
-          </a:prstGeom>
-          <a:solidFill>
-            <a:srgbClr val="FFFFFF"/>
-          </a:solidFill>
-          <a:ln>
-            <a:noFill/>
+          <a:ln w="19050">
+            <a:solidFill>
+              <a:srgbClr val="B6CCDE"/>
+            </a:solidFill>
           </a:ln>
           <a:effectLst/>
         </p:spPr>
@@ -3218,14 +3183,58 @@
       </p:sp>
       <p:sp>
         <p:nvSpPr>
+          <p:cNvPr id="4" name="Oval 3"/>
+          <p:cNvSpPr/>
+          <p:nvPr/>
+        </p:nvSpPr>
+        <p:spPr>
+          <a:xfrm>
+            <a:off x="5479084" y="1120139"/>
+            <a:ext cx="1234440" cy="1234440"/>
+          </a:xfrm>
+          <a:prstGeom prst="ellipse">
+            <a:avLst/>
+          </a:prstGeom>
+          <a:solidFill>
+            <a:srgbClr val="FFFFFF"/>
+          </a:solidFill>
+          <a:ln>
+            <a:noFill/>
+          </a:ln>
+          <a:effectLst/>
+        </p:spPr>
+        <p:style>
+          <a:lnRef idx="1">
+            <a:schemeClr val="accent1"/>
+          </a:lnRef>
+          <a:fillRef idx="3">
+            <a:schemeClr val="accent1"/>
+          </a:fillRef>
+          <a:effectRef idx="2">
+            <a:schemeClr val="accent1"/>
+          </a:effectRef>
+          <a:fontRef idx="minor">
+            <a:schemeClr val="lt1"/>
+          </a:fontRef>
+        </p:style>
+        <p:txBody>
+          <a:bodyPr rtlCol="0" anchor="ctr"/>
+          <a:lstStyle/>
+          <a:p>
+            <a:pPr algn="ctr"/>
+          </a:p>
+        </p:txBody>
+      </p:sp>
+      <p:sp>
+        <p:nvSpPr>
           <p:cNvPr id="5" name="TextBox 4"/>
           <p:cNvSpPr txBox="1"/>
           <p:nvPr/>
         </p:nvSpPr>
         <p:spPr>
           <a:xfrm>
-            <a:off x="4663440" y="2286000"/>
-            <a:ext cx="6492240" cy="2926080"/>
+            <a:off x="5479084" y="1120139"/>
+            <a:ext cx="1234440" cy="1234440"/>
           </a:xfrm>
           <a:prstGeom prst="rect">
             <a:avLst/>
@@ -3233,68 +3242,137 @@
           <a:noFill/>
         </p:spPr>
         <p:txBody>
+          <a:bodyPr wrap="none" anchor="ctr">
+            <a:spAutoFit/>
+          </a:bodyPr>
+          <a:lstStyle/>
+          <a:p>
+            <a:pPr algn="ctr"/>
+            <a:r>
+              <a:rPr sz="4000" b="1">
+                <a:solidFill>
+                  <a:srgbClr val="2F6EA3"/>
+                </a:solidFill>
+                <a:latin typeface="Franklin Gothic Medium"/>
+              </a:rPr>
+              <a:t>CC</a:t>
+            </a:r>
+          </a:p>
+        </p:txBody>
+      </p:sp>
+      <p:sp>
+        <p:nvSpPr>
+          <p:cNvPr id="6" name="TextBox 5"/>
+          <p:cNvSpPr txBox="1"/>
+          <p:nvPr/>
+        </p:nvSpPr>
+        <p:spPr>
+          <a:xfrm>
+            <a:off x="1188720" y="2880360"/>
+            <a:ext cx="9784080" cy="1463040"/>
+          </a:xfrm>
+          <a:prstGeom prst="rect">
+            <a:avLst/>
+          </a:prstGeom>
+          <a:noFill/>
+        </p:spPr>
+        <p:txBody>
+          <a:bodyPr wrap="square" anchor="ctr">
+            <a:spAutoFit/>
+          </a:bodyPr>
+          <a:lstStyle/>
+          <a:p>
+            <a:pPr algn="ctr"/>
+            <a:r>
+              <a:rPr sz="3400" b="1" i="0">
+                <a:solidFill>
+                  <a:srgbClr val="FFFFFF"/>
+                </a:solidFill>
+                <a:latin typeface="Franklin Gothic Medium"/>
+              </a:rPr>
+              <a:t>Cold Chain Logistics Monitoring</a:t>
+            </a:r>
+          </a:p>
+        </p:txBody>
+      </p:sp>
+      <p:sp>
+        <p:nvSpPr>
+          <p:cNvPr id="7" name="TextBox 6"/>
+          <p:cNvSpPr txBox="1"/>
+          <p:nvPr/>
+        </p:nvSpPr>
+        <p:spPr>
+          <a:xfrm>
+            <a:off x="1371600" y="4206240"/>
+            <a:ext cx="9418320" cy="548640"/>
+          </a:xfrm>
+          <a:prstGeom prst="rect">
+            <a:avLst/>
+          </a:prstGeom>
+          <a:noFill/>
+        </p:spPr>
+        <p:txBody>
           <a:bodyPr wrap="square" anchor="t">
             <a:spAutoFit/>
           </a:bodyPr>
           <a:lstStyle/>
           <a:p>
-            <a:pPr algn="l"/>
-            <a:r>
-              <a:rPr sz="1800" b="0">
-                <a:solidFill>
-                  <a:srgbClr val="5C655F"/>
+            <a:pPr algn="ctr"/>
+            <a:r>
+              <a:rPr sz="1700" b="0" i="1">
+                <a:solidFill>
+                  <a:srgbClr val="C4D6E5"/>
                 </a:solidFill>
                 <a:latin typeface="Calibri"/>
               </a:rPr>
               <a:t>Ten container sensors, five risk signals, one live manifest</a:t>
             </a:r>
           </a:p>
-          <a:p>
-            <a:pPr algn="l"/>
-            <a:r>
-              <a:rPr sz="1700" b="1">
-                <a:solidFill>
-                  <a:srgbClr val="232A26"/>
+        </p:txBody>
+      </p:sp>
+      <p:sp>
+        <p:nvSpPr>
+          <p:cNvPr id="8" name="TextBox 7"/>
+          <p:cNvSpPr txBox="1"/>
+          <p:nvPr/>
+        </p:nvSpPr>
+        <p:spPr>
+          <a:xfrm>
+            <a:off x="1371600" y="5029200"/>
+            <a:ext cx="9418320" cy="1280160"/>
+          </a:xfrm>
+          <a:prstGeom prst="rect">
+            <a:avLst/>
+          </a:prstGeom>
+          <a:noFill/>
+        </p:spPr>
+        <p:txBody>
+          <a:bodyPr wrap="square" anchor="t">
+            <a:spAutoFit/>
+          </a:bodyPr>
+          <a:lstStyle/>
+          <a:p>
+            <a:pPr algn="ctr"/>
+            <a:r>
+              <a:rPr sz="1250" b="0" i="0">
+                <a:solidFill>
+                  <a:srgbClr val="ABC5DA"/>
                 </a:solidFill>
                 <a:latin typeface="Calibri"/>
               </a:rPr>
-              <a:t/>
-            </a:r>
-          </a:p>
-          <a:p>
-            <a:pPr algn="l"/>
-            <a:r>
-              <a:rPr sz="1300" b="0">
-                <a:solidFill>
-                  <a:srgbClr val="5C655F"/>
+              <a:t>MSc in Cloud Computing   ·   Fog and Edge Computing (H9FECC)</a:t>
+            </a:r>
+          </a:p>
+          <a:p>
+            <a:pPr algn="ctr"/>
+            <a:r>
+              <a:rPr sz="1250" b="0" i="0">
+                <a:solidFill>
+                  <a:srgbClr val="ABC5DA"/>
                 </a:solidFill>
                 <a:latin typeface="Calibri"/>
               </a:rPr>
-              <a:t/>
-            </a:r>
-          </a:p>
-          <a:p>
-            <a:pPr algn="l"/>
-            <a:r>
-              <a:rPr sz="1300" b="0">
-                <a:solidFill>
-                  <a:srgbClr val="5C655F"/>
-                </a:solidFill>
-                <a:latin typeface="Calibri"/>
-              </a:rPr>
-              <a:t>MSc in Cloud Computing</a:t>
-            </a:r>
-          </a:p>
-          <a:p>
-            <a:pPr algn="l"/>
-            <a:r>
-              <a:rPr sz="1300" b="0">
-                <a:solidFill>
-                  <a:srgbClr val="5C655F"/>
-                </a:solidFill>
-                <a:latin typeface="Calibri"/>
-              </a:rPr>
-              <a:t>Fog and Edge Computing (H9FECC), National College of Ireland</a:t>
+              <a:t>National College of Ireland</a:t>
             </a:r>
           </a:p>
         </p:txBody>
@@ -3553,7 +3631,7 @@
           <a:p>
             <a:pPr algn="l"/>
             <a:r>
-              <a:rPr sz="1400" b="1">
+              <a:rPr sz="1400" b="1" i="0">
                 <a:solidFill>
                   <a:srgbClr val="FFFFFF"/>
                 </a:solidFill>
@@ -3818,7 +3896,7 @@
           <a:p>
             <a:pPr algn="l"/>
             <a:r>
-              <a:rPr sz="1400" b="1">
+              <a:rPr sz="1400" b="1" i="0">
                 <a:solidFill>
                   <a:srgbClr val="FFFFFF"/>
                 </a:solidFill>
@@ -4051,7 +4129,7 @@
           <a:p>
             <a:pPr algn="l"/>
             <a:r>
-              <a:rPr sz="1400" b="1">
+              <a:rPr sz="1400" b="1" i="0">
                 <a:solidFill>
                   <a:srgbClr val="FFFFFF"/>
                 </a:solidFill>
@@ -4356,7 +4434,7 @@
           <a:p>
             <a:pPr algn="l"/>
             <a:r>
-              <a:rPr sz="1400" b="1">
+              <a:rPr sz="1400" b="1" i="0">
                 <a:solidFill>
                   <a:srgbClr val="FFFFFF"/>
                 </a:solidFill>
@@ -4573,7 +4651,7 @@
           <a:p>
             <a:pPr algn="l"/>
             <a:r>
-              <a:rPr sz="1400" b="1">
+              <a:rPr sz="1400" b="1" i="0">
                 <a:solidFill>
                   <a:srgbClr val="FFFFFF"/>
                 </a:solidFill>

--- a/ppt/cold-chain-logistics.pptx
+++ b/ppt/cold-chain-logistics.pptx
@@ -3183,58 +3183,14 @@
       </p:sp>
       <p:sp>
         <p:nvSpPr>
-          <p:cNvPr id="4" name="Oval 3"/>
-          <p:cNvSpPr/>
+          <p:cNvPr id="4" name="TextBox 3"/>
+          <p:cNvSpPr txBox="1"/>
           <p:nvPr/>
         </p:nvSpPr>
         <p:spPr>
           <a:xfrm>
-            <a:off x="5479084" y="1120139"/>
-            <a:ext cx="1234440" cy="1234440"/>
-          </a:xfrm>
-          <a:prstGeom prst="ellipse">
-            <a:avLst/>
-          </a:prstGeom>
-          <a:solidFill>
-            <a:srgbClr val="FFFFFF"/>
-          </a:solidFill>
-          <a:ln>
-            <a:noFill/>
-          </a:ln>
-          <a:effectLst/>
-        </p:spPr>
-        <p:style>
-          <a:lnRef idx="1">
-            <a:schemeClr val="accent1"/>
-          </a:lnRef>
-          <a:fillRef idx="3">
-            <a:schemeClr val="accent1"/>
-          </a:fillRef>
-          <a:effectRef idx="2">
-            <a:schemeClr val="accent1"/>
-          </a:effectRef>
-          <a:fontRef idx="minor">
-            <a:schemeClr val="lt1"/>
-          </a:fontRef>
-        </p:style>
-        <p:txBody>
-          <a:bodyPr rtlCol="0" anchor="ctr"/>
-          <a:lstStyle/>
-          <a:p>
-            <a:pPr algn="ctr"/>
-          </a:p>
-        </p:txBody>
-      </p:sp>
-      <p:sp>
-        <p:nvSpPr>
-          <p:cNvPr id="5" name="TextBox 4"/>
-          <p:cNvSpPr txBox="1"/>
-          <p:nvPr/>
-        </p:nvSpPr>
-        <p:spPr>
-          <a:xfrm>
-            <a:off x="5479084" y="1120139"/>
-            <a:ext cx="1234440" cy="1234440"/>
+            <a:off x="1188720" y="2103120"/>
+            <a:ext cx="9784080" cy="1783080"/>
           </a:xfrm>
           <a:prstGeom prst="rect">
             <a:avLst/>
@@ -3242,41 +3198,6 @@
           <a:noFill/>
         </p:spPr>
         <p:txBody>
-          <a:bodyPr wrap="none" anchor="ctr">
-            <a:spAutoFit/>
-          </a:bodyPr>
-          <a:lstStyle/>
-          <a:p>
-            <a:pPr algn="ctr"/>
-            <a:r>
-              <a:rPr sz="4000" b="1">
-                <a:solidFill>
-                  <a:srgbClr val="2F6EA3"/>
-                </a:solidFill>
-                <a:latin typeface="Franklin Gothic Medium"/>
-              </a:rPr>
-              <a:t>CC</a:t>
-            </a:r>
-          </a:p>
-        </p:txBody>
-      </p:sp>
-      <p:sp>
-        <p:nvSpPr>
-          <p:cNvPr id="6" name="TextBox 5"/>
-          <p:cNvSpPr txBox="1"/>
-          <p:nvPr/>
-        </p:nvSpPr>
-        <p:spPr>
-          <a:xfrm>
-            <a:off x="1188720" y="2880360"/>
-            <a:ext cx="9784080" cy="1463040"/>
-          </a:xfrm>
-          <a:prstGeom prst="rect">
-            <a:avLst/>
-          </a:prstGeom>
-          <a:noFill/>
-        </p:spPr>
-        <p:txBody>
           <a:bodyPr wrap="square" anchor="ctr">
             <a:spAutoFit/>
           </a:bodyPr>
@@ -3297,13 +3218,13 @@
       </p:sp>
       <p:sp>
         <p:nvSpPr>
-          <p:cNvPr id="7" name="TextBox 6"/>
+          <p:cNvPr id="5" name="TextBox 4"/>
           <p:cNvSpPr txBox="1"/>
           <p:nvPr/>
         </p:nvSpPr>
         <p:spPr>
           <a:xfrm>
-            <a:off x="1371600" y="4206240"/>
+            <a:off x="1371600" y="3931920"/>
             <a:ext cx="9418320" cy="548640"/>
           </a:xfrm>
           <a:prstGeom prst="rect">
@@ -3332,13 +3253,13 @@
       </p:sp>
       <p:sp>
         <p:nvSpPr>
-          <p:cNvPr id="8" name="TextBox 7"/>
+          <p:cNvPr id="6" name="TextBox 5"/>
           <p:cNvSpPr txBox="1"/>
           <p:nvPr/>
         </p:nvSpPr>
         <p:spPr>
           <a:xfrm>
-            <a:off x="1371600" y="5029200"/>
+            <a:off x="1371600" y="4800600"/>
             <a:ext cx="9418320" cy="1280160"/>
           </a:xfrm>
           <a:prstGeom prst="rect">

--- a/ppt/cold-chain-logistics.pptx
+++ b/ppt/cold-chain-logistics.pptx
@@ -3108,7 +3108,7 @@
             <a:avLst/>
           </a:prstGeom>
           <a:solidFill>
-            <a:srgbClr val="2F6EA3"/>
+            <a:srgbClr val="1F6FC0"/>
           </a:solidFill>
           <a:ln>
             <a:noFill/>
@@ -3154,7 +3154,7 @@
           <a:noFill/>
           <a:ln w="19050">
             <a:solidFill>
-              <a:srgbClr val="B6CCDE"/>
+              <a:srgbClr val="B0CCE8"/>
             </a:solidFill>
           </a:ln>
           <a:effectLst/>
@@ -3242,7 +3242,7 @@
             <a:r>
               <a:rPr sz="1700" b="0" i="1">
                 <a:solidFill>
-                  <a:srgbClr val="C4D6E5"/>
+                  <a:srgbClr val="C0D6ED"/>
                 </a:solidFill>
                 <a:latin typeface="Calibri"/>
               </a:rPr>
@@ -3277,7 +3277,7 @@
             <a:r>
               <a:rPr sz="1250" b="0" i="0">
                 <a:solidFill>
-                  <a:srgbClr val="ABC5DA"/>
+                  <a:srgbClr val="A5C5E5"/>
                 </a:solidFill>
                 <a:latin typeface="Calibri"/>
               </a:rPr>
@@ -3289,7 +3289,7 @@
             <a:r>
               <a:rPr sz="1250" b="0" i="0">
                 <a:solidFill>
-                  <a:srgbClr val="ABC5DA"/>
+                  <a:srgbClr val="A5C5E5"/>
                 </a:solidFill>
                 <a:latin typeface="Calibri"/>
               </a:rPr>
@@ -3331,7 +3331,7 @@
             <a:avLst/>
           </a:prstGeom>
           <a:solidFill>
-            <a:srgbClr val="2F6EA3"/>
+            <a:srgbClr val="1F6FC0"/>
           </a:solidFill>
           <a:ln>
             <a:noFill/>
@@ -3471,7 +3471,7 @@
             <a:r>
               <a:rPr sz="1700" b="1">
                 <a:solidFill>
-                  <a:srgbClr val="2F6EA3"/>
+                  <a:srgbClr val="1F6FC0"/>
                 </a:solidFill>
                 <a:latin typeface="Calibri"/>
               </a:rPr>
@@ -3596,7 +3596,7 @@
             <a:avLst/>
           </a:prstGeom>
           <a:solidFill>
-            <a:srgbClr val="2F6EA3"/>
+            <a:srgbClr val="1F6FC0"/>
           </a:solidFill>
           <a:ln>
             <a:noFill/>
@@ -3784,7 +3784,7 @@
             <a:r>
               <a:rPr sz="1700" b="1">
                 <a:solidFill>
-                  <a:srgbClr val="2F6EA3"/>
+                  <a:srgbClr val="1F6FC0"/>
                 </a:solidFill>
                 <a:latin typeface="Calibri"/>
               </a:rPr>
@@ -3861,7 +3861,7 @@
             <a:avLst/>
           </a:prstGeom>
           <a:solidFill>
-            <a:srgbClr val="2F6EA3"/>
+            <a:srgbClr val="1F6FC0"/>
           </a:solidFill>
           <a:ln>
             <a:noFill/>
@@ -3969,7 +3969,7 @@
             <a:r>
               <a:rPr sz="1500" b="1">
                 <a:solidFill>
-                  <a:srgbClr val="2F6EA3"/>
+                  <a:srgbClr val="1F6FC0"/>
                 </a:solidFill>
                 <a:latin typeface="Calibri"/>
               </a:rPr>
@@ -4118,7 +4118,7 @@
             <a:avLst/>
           </a:prstGeom>
           <a:solidFill>
-            <a:srgbClr val="2F6EA3"/>
+            <a:srgbClr val="1F6FC0"/>
           </a:solidFill>
           <a:ln>
             <a:noFill/>
@@ -4210,7 +4210,7 @@
             <a:r>
               <a:rPr sz="1500" b="1">
                 <a:solidFill>
-                  <a:srgbClr val="2F6EA3"/>
+                  <a:srgbClr val="1F6FC0"/>
                 </a:solidFill>
                 <a:latin typeface="Calibri"/>
               </a:rPr>
@@ -4242,7 +4242,7 @@
             <a:r>
               <a:rPr sz="1500" b="1">
                 <a:solidFill>
-                  <a:srgbClr val="2F6EA3"/>
+                  <a:srgbClr val="1F6FC0"/>
                 </a:solidFill>
                 <a:latin typeface="Calibri"/>
               </a:rPr>
@@ -4274,7 +4274,7 @@
             <a:r>
               <a:rPr sz="1500" b="1">
                 <a:solidFill>
-                  <a:srgbClr val="2F6EA3"/>
+                  <a:srgbClr val="1F6FC0"/>
                 </a:solidFill>
                 <a:latin typeface="Calibri"/>
               </a:rPr>
@@ -4399,7 +4399,7 @@
             <a:avLst/>
           </a:prstGeom>
           <a:solidFill>
-            <a:srgbClr val="2F6EA3"/>
+            <a:srgbClr val="1F6FC0"/>
           </a:solidFill>
           <a:ln>
             <a:noFill/>
@@ -4491,7 +4491,7 @@
             <a:r>
               <a:rPr sz="1700" b="1">
                 <a:solidFill>
-                  <a:srgbClr val="2F6EA3"/>
+                  <a:srgbClr val="1F6FC0"/>
                 </a:solidFill>
                 <a:latin typeface="Calibri"/>
               </a:rPr>

--- a/ppt/cold-chain-logistics.pptx
+++ b/ppt/cold-chain-logistics.pptx
@@ -3325,7 +3325,7 @@
         <p:spPr>
           <a:xfrm>
             <a:off x="0" y="0"/>
-            <a:ext cx="4114800" cy="6858000"/>
+            <a:ext cx="1051560" cy="6858000"/>
           </a:xfrm>
           <a:prstGeom prst="rect">
             <a:avLst/>
@@ -3372,8 +3372,8 @@
         </p:nvSpPr>
         <p:spPr>
           <a:xfrm>
-            <a:off x="457200" y="640080"/>
-            <a:ext cx="3291840" cy="4572000"/>
+            <a:off x="1371600" y="457200"/>
+            <a:ext cx="9311335" cy="868680"/>
           </a:xfrm>
         </p:spPr>
         <p:txBody>
@@ -3382,9 +3382,9 @@
           <a:p>
             <a:pPr algn="l"/>
             <a:r>
-              <a:rPr b="1" sz="1800">
-                <a:solidFill>
-                  <a:srgbClr val="FFFFFF"/>
+              <a:rPr b="1" sz="2700">
+                <a:solidFill>
+                  <a:srgbClr val="1F6FC0"/>
                 </a:solidFill>
                 <a:latin typeface="Franklin Gothic Medium"/>
               </a:rPr>
@@ -3405,8 +3405,8 @@
         </p:nvSpPr>
         <p:spPr>
           <a:xfrm>
-            <a:off x="4572000" y="640080"/>
-            <a:ext cx="6492240" cy="5577840"/>
+            <a:off x="1389888" y="1508760"/>
+            <a:ext cx="9402775" cy="4846320"/>
           </a:xfrm>
         </p:spPr>
         <p:txBody>
@@ -3536,8 +3536,8 @@
         </p:nvSpPr>
         <p:spPr>
           <a:xfrm>
-            <a:off x="502920" y="6126480"/>
-            <a:ext cx="1097280" cy="457200"/>
+            <a:off x="0" y="320040"/>
+            <a:ext cx="1051560" cy="914400"/>
           </a:xfrm>
           <a:prstGeom prst="rect">
             <a:avLst/>
@@ -3550,16 +3550,60 @@
           </a:bodyPr>
           <a:lstStyle/>
           <a:p>
-            <a:pPr algn="l"/>
-            <a:r>
-              <a:rPr sz="1400" b="1" i="0">
+            <a:pPr algn="ctr"/>
+            <a:r>
+              <a:rPr sz="2600" b="1" i="0">
                 <a:solidFill>
                   <a:srgbClr val="FFFFFF"/>
                 </a:solidFill>
                 <a:latin typeface="Franklin Gothic Medium"/>
               </a:rPr>
-              <a:t>01</a:t>
-            </a:r>
+              <a:t>1</a:t>
+            </a:r>
+          </a:p>
+        </p:txBody>
+      </p:sp>
+      <p:sp>
+        <p:nvSpPr>
+          <p:cNvPr id="6" name="Rectangle 5"/>
+          <p:cNvSpPr/>
+          <p:nvPr/>
+        </p:nvSpPr>
+        <p:spPr>
+          <a:xfrm>
+            <a:off x="1389888" y="1325880"/>
+            <a:ext cx="2926080" cy="36576"/>
+          </a:xfrm>
+          <a:prstGeom prst="rect">
+            <a:avLst/>
+          </a:prstGeom>
+          <a:solidFill>
+            <a:srgbClr val="1F6FC0"/>
+          </a:solidFill>
+          <a:ln>
+            <a:noFill/>
+          </a:ln>
+          <a:effectLst/>
+        </p:spPr>
+        <p:style>
+          <a:lnRef idx="1">
+            <a:schemeClr val="accent1"/>
+          </a:lnRef>
+          <a:fillRef idx="3">
+            <a:schemeClr val="accent1"/>
+          </a:fillRef>
+          <a:effectRef idx="2">
+            <a:schemeClr val="accent1"/>
+          </a:effectRef>
+          <a:fontRef idx="minor">
+            <a:schemeClr val="lt1"/>
+          </a:fontRef>
+        </p:style>
+        <p:txBody>
+          <a:bodyPr rtlCol="0" anchor="ctr"/>
+          <a:lstStyle/>
+          <a:p>
+            <a:pPr algn="ctr"/>
           </a:p>
         </p:txBody>
       </p:sp>
@@ -3590,7 +3634,7 @@
         <p:spPr>
           <a:xfrm>
             <a:off x="0" y="0"/>
-            <a:ext cx="4114800" cy="6858000"/>
+            <a:ext cx="1051560" cy="6858000"/>
           </a:xfrm>
           <a:prstGeom prst="rect">
             <a:avLst/>
@@ -3637,8 +3681,8 @@
         </p:nvSpPr>
         <p:spPr>
           <a:xfrm>
-            <a:off x="457200" y="640080"/>
-            <a:ext cx="3291840" cy="4572000"/>
+            <a:off x="1371600" y="457200"/>
+            <a:ext cx="9311335" cy="868680"/>
           </a:xfrm>
         </p:spPr>
         <p:txBody>
@@ -3647,9 +3691,9 @@
           <a:p>
             <a:pPr algn="l"/>
             <a:r>
-              <a:rPr b="1" sz="1800">
-                <a:solidFill>
-                  <a:srgbClr val="FFFFFF"/>
+              <a:rPr b="1" sz="2700">
+                <a:solidFill>
+                  <a:srgbClr val="1F6FC0"/>
                 </a:solidFill>
                 <a:latin typeface="Franklin Gothic Medium"/>
               </a:rPr>
@@ -3670,8 +3714,8 @@
         </p:nvSpPr>
         <p:spPr>
           <a:xfrm>
-            <a:off x="4572000" y="640080"/>
-            <a:ext cx="6492240" cy="5577840"/>
+            <a:off x="1389888" y="1508760"/>
+            <a:ext cx="9402775" cy="4846320"/>
           </a:xfrm>
         </p:spPr>
         <p:txBody>
@@ -3801,8 +3845,8 @@
         </p:nvSpPr>
         <p:spPr>
           <a:xfrm>
-            <a:off x="502920" y="6126480"/>
-            <a:ext cx="1097280" cy="457200"/>
+            <a:off x="0" y="320040"/>
+            <a:ext cx="1051560" cy="914400"/>
           </a:xfrm>
           <a:prstGeom prst="rect">
             <a:avLst/>
@@ -3815,16 +3859,60 @@
           </a:bodyPr>
           <a:lstStyle/>
           <a:p>
-            <a:pPr algn="l"/>
-            <a:r>
-              <a:rPr sz="1400" b="1" i="0">
+            <a:pPr algn="ctr"/>
+            <a:r>
+              <a:rPr sz="2600" b="1" i="0">
                 <a:solidFill>
                   <a:srgbClr val="FFFFFF"/>
                 </a:solidFill>
                 <a:latin typeface="Franklin Gothic Medium"/>
               </a:rPr>
-              <a:t>02</a:t>
-            </a:r>
+              <a:t>2</a:t>
+            </a:r>
+          </a:p>
+        </p:txBody>
+      </p:sp>
+      <p:sp>
+        <p:nvSpPr>
+          <p:cNvPr id="6" name="Rectangle 5"/>
+          <p:cNvSpPr/>
+          <p:nvPr/>
+        </p:nvSpPr>
+        <p:spPr>
+          <a:xfrm>
+            <a:off x="1389888" y="1325880"/>
+            <a:ext cx="2926080" cy="36576"/>
+          </a:xfrm>
+          <a:prstGeom prst="rect">
+            <a:avLst/>
+          </a:prstGeom>
+          <a:solidFill>
+            <a:srgbClr val="1F6FC0"/>
+          </a:solidFill>
+          <a:ln>
+            <a:noFill/>
+          </a:ln>
+          <a:effectLst/>
+        </p:spPr>
+        <p:style>
+          <a:lnRef idx="1">
+            <a:schemeClr val="accent1"/>
+          </a:lnRef>
+          <a:fillRef idx="3">
+            <a:schemeClr val="accent1"/>
+          </a:fillRef>
+          <a:effectRef idx="2">
+            <a:schemeClr val="accent1"/>
+          </a:effectRef>
+          <a:fontRef idx="minor">
+            <a:schemeClr val="lt1"/>
+          </a:fontRef>
+        </p:style>
+        <p:txBody>
+          <a:bodyPr rtlCol="0" anchor="ctr"/>
+          <a:lstStyle/>
+          <a:p>
+            <a:pPr algn="ctr"/>
           </a:p>
         </p:txBody>
       </p:sp>
@@ -3855,7 +3943,7 @@
         <p:spPr>
           <a:xfrm>
             <a:off x="0" y="0"/>
-            <a:ext cx="4114800" cy="6858000"/>
+            <a:ext cx="1051560" cy="6858000"/>
           </a:xfrm>
           <a:prstGeom prst="rect">
             <a:avLst/>
@@ -3902,8 +3990,8 @@
         </p:nvSpPr>
         <p:spPr>
           <a:xfrm>
-            <a:off x="457200" y="640080"/>
-            <a:ext cx="3291840" cy="4572000"/>
+            <a:off x="1371600" y="457200"/>
+            <a:ext cx="9311335" cy="868680"/>
           </a:xfrm>
         </p:spPr>
         <p:txBody>
@@ -3912,9 +4000,9 @@
           <a:p>
             <a:pPr algn="l"/>
             <a:r>
-              <a:rPr b="1" sz="2200">
-                <a:solidFill>
-                  <a:srgbClr val="FFFFFF"/>
+              <a:rPr b="1" sz="2700">
+                <a:solidFill>
+                  <a:srgbClr val="1F6FC0"/>
                 </a:solidFill>
                 <a:latin typeface="Franklin Gothic Medium"/>
               </a:rPr>
@@ -3935,8 +4023,8 @@
         </p:nvSpPr>
         <p:spPr>
           <a:xfrm>
-            <a:off x="4526280" y="685800"/>
-            <a:ext cx="3977639" cy="5394960"/>
+            <a:off x="1389888" y="1508760"/>
+            <a:ext cx="5394960" cy="4754880"/>
           </a:xfrm>
         </p:spPr>
         <p:txBody>
@@ -4034,8 +4122,8 @@
         </p:nvSpPr>
         <p:spPr>
           <a:xfrm>
-            <a:off x="502920" y="6126480"/>
-            <a:ext cx="1097280" cy="457200"/>
+            <a:off x="0" y="320040"/>
+            <a:ext cx="1051560" cy="914400"/>
           </a:xfrm>
           <a:prstGeom prst="rect">
             <a:avLst/>
@@ -4048,22 +4136,66 @@
           </a:bodyPr>
           <a:lstStyle/>
           <a:p>
-            <a:pPr algn="l"/>
-            <a:r>
-              <a:rPr sz="1400" b="1" i="0">
+            <a:pPr algn="ctr"/>
+            <a:r>
+              <a:rPr sz="2600" b="1" i="0">
                 <a:solidFill>
                   <a:srgbClr val="FFFFFF"/>
                 </a:solidFill>
                 <a:latin typeface="Franklin Gothic Medium"/>
               </a:rPr>
-              <a:t>03</a:t>
-            </a:r>
+              <a:t>3</a:t>
+            </a:r>
+          </a:p>
+        </p:txBody>
+      </p:sp>
+      <p:sp>
+        <p:nvSpPr>
+          <p:cNvPr id="6" name="Rectangle 5"/>
+          <p:cNvSpPr/>
+          <p:nvPr/>
+        </p:nvSpPr>
+        <p:spPr>
+          <a:xfrm>
+            <a:off x="1389888" y="1325880"/>
+            <a:ext cx="2926080" cy="36576"/>
+          </a:xfrm>
+          <a:prstGeom prst="rect">
+            <a:avLst/>
+          </a:prstGeom>
+          <a:solidFill>
+            <a:srgbClr val="1F6FC0"/>
+          </a:solidFill>
+          <a:ln>
+            <a:noFill/>
+          </a:ln>
+          <a:effectLst/>
+        </p:spPr>
+        <p:style>
+          <a:lnRef idx="1">
+            <a:schemeClr val="accent1"/>
+          </a:lnRef>
+          <a:fillRef idx="3">
+            <a:schemeClr val="accent1"/>
+          </a:fillRef>
+          <a:effectRef idx="2">
+            <a:schemeClr val="accent1"/>
+          </a:effectRef>
+          <a:fontRef idx="minor">
+            <a:schemeClr val="lt1"/>
+          </a:fontRef>
+        </p:style>
+        <p:txBody>
+          <a:bodyPr rtlCol="0" anchor="ctr"/>
+          <a:lstStyle/>
+          <a:p>
+            <a:pPr algn="ctr"/>
           </a:p>
         </p:txBody>
       </p:sp>
       <p:pic>
         <p:nvPicPr>
-          <p:cNvPr id="6" name="Picture 5" descr="dashboard-desktop.png"/>
+          <p:cNvPr id="7" name="Picture 6" descr="dashboard-desktop.png"/>
           <p:cNvPicPr>
             <a:picLocks noChangeAspect="1"/>
           </p:cNvPicPr>
@@ -4077,8 +4209,8 @@
         </p:blipFill>
         <p:spPr>
           <a:xfrm>
-            <a:off x="8686800" y="2049541"/>
-            <a:ext cx="3063239" cy="2393156"/>
+            <a:off x="6858000" y="2044541"/>
+            <a:ext cx="4480560" cy="3500437"/>
           </a:xfrm>
           <a:prstGeom prst="rect">
             <a:avLst/>
@@ -4112,7 +4244,7 @@
         <p:spPr>
           <a:xfrm>
             <a:off x="0" y="0"/>
-            <a:ext cx="4114800" cy="6858000"/>
+            <a:ext cx="1051560" cy="6858000"/>
           </a:xfrm>
           <a:prstGeom prst="rect">
             <a:avLst/>
@@ -4159,8 +4291,8 @@
         </p:nvSpPr>
         <p:spPr>
           <a:xfrm>
-            <a:off x="457200" y="640080"/>
-            <a:ext cx="3291840" cy="4572000"/>
+            <a:off x="1371600" y="457200"/>
+            <a:ext cx="9311335" cy="868680"/>
           </a:xfrm>
         </p:spPr>
         <p:txBody>
@@ -4169,9 +4301,9 @@
           <a:p>
             <a:pPr algn="l"/>
             <a:r>
-              <a:rPr b="1" sz="1800">
-                <a:solidFill>
-                  <a:srgbClr val="FFFFFF"/>
+              <a:rPr b="1" sz="2400">
+                <a:solidFill>
+                  <a:srgbClr val="1F6FC0"/>
                 </a:solidFill>
                 <a:latin typeface="Franklin Gothic Medium"/>
               </a:rPr>
@@ -4192,8 +4324,8 @@
         </p:nvSpPr>
         <p:spPr>
           <a:xfrm>
-            <a:off x="4572000" y="640080"/>
-            <a:ext cx="6492240" cy="5577840"/>
+            <a:off x="1389888" y="1508760"/>
+            <a:ext cx="9402775" cy="4846320"/>
           </a:xfrm>
         </p:spPr>
         <p:txBody>
@@ -4339,8 +4471,8 @@
         </p:nvSpPr>
         <p:spPr>
           <a:xfrm>
-            <a:off x="502920" y="6126480"/>
-            <a:ext cx="1097280" cy="457200"/>
+            <a:off x="0" y="320040"/>
+            <a:ext cx="1051560" cy="914400"/>
           </a:xfrm>
           <a:prstGeom prst="rect">
             <a:avLst/>
@@ -4353,16 +4485,60 @@
           </a:bodyPr>
           <a:lstStyle/>
           <a:p>
-            <a:pPr algn="l"/>
-            <a:r>
-              <a:rPr sz="1400" b="1" i="0">
+            <a:pPr algn="ctr"/>
+            <a:r>
+              <a:rPr sz="2600" b="1" i="0">
                 <a:solidFill>
                   <a:srgbClr val="FFFFFF"/>
                 </a:solidFill>
                 <a:latin typeface="Franklin Gothic Medium"/>
               </a:rPr>
-              <a:t>04</a:t>
-            </a:r>
+              <a:t>4</a:t>
+            </a:r>
+          </a:p>
+        </p:txBody>
+      </p:sp>
+      <p:sp>
+        <p:nvSpPr>
+          <p:cNvPr id="6" name="Rectangle 5"/>
+          <p:cNvSpPr/>
+          <p:nvPr/>
+        </p:nvSpPr>
+        <p:spPr>
+          <a:xfrm>
+            <a:off x="1389888" y="1325880"/>
+            <a:ext cx="2926080" cy="36576"/>
+          </a:xfrm>
+          <a:prstGeom prst="rect">
+            <a:avLst/>
+          </a:prstGeom>
+          <a:solidFill>
+            <a:srgbClr val="1F6FC0"/>
+          </a:solidFill>
+          <a:ln>
+            <a:noFill/>
+          </a:ln>
+          <a:effectLst/>
+        </p:spPr>
+        <p:style>
+          <a:lnRef idx="1">
+            <a:schemeClr val="accent1"/>
+          </a:lnRef>
+          <a:fillRef idx="3">
+            <a:schemeClr val="accent1"/>
+          </a:fillRef>
+          <a:effectRef idx="2">
+            <a:schemeClr val="accent1"/>
+          </a:effectRef>
+          <a:fontRef idx="minor">
+            <a:schemeClr val="lt1"/>
+          </a:fontRef>
+        </p:style>
+        <p:txBody>
+          <a:bodyPr rtlCol="0" anchor="ctr"/>
+          <a:lstStyle/>
+          <a:p>
+            <a:pPr algn="ctr"/>
           </a:p>
         </p:txBody>
       </p:sp>
@@ -4393,7 +4569,7 @@
         <p:spPr>
           <a:xfrm>
             <a:off x="0" y="0"/>
-            <a:ext cx="4114800" cy="6858000"/>
+            <a:ext cx="1051560" cy="6858000"/>
           </a:xfrm>
           <a:prstGeom prst="rect">
             <a:avLst/>
@@ -4440,8 +4616,8 @@
         </p:nvSpPr>
         <p:spPr>
           <a:xfrm>
-            <a:off x="457200" y="640080"/>
-            <a:ext cx="3291840" cy="4572000"/>
+            <a:off x="1371600" y="457200"/>
+            <a:ext cx="9311335" cy="868680"/>
           </a:xfrm>
         </p:spPr>
         <p:txBody>
@@ -4450,9 +4626,9 @@
           <a:p>
             <a:pPr algn="l"/>
             <a:r>
-              <a:rPr b="1" sz="2200">
-                <a:solidFill>
-                  <a:srgbClr val="FFFFFF"/>
+              <a:rPr b="1" sz="2700">
+                <a:solidFill>
+                  <a:srgbClr val="1F6FC0"/>
                 </a:solidFill>
                 <a:latin typeface="Franklin Gothic Medium"/>
               </a:rPr>
@@ -4473,8 +4649,8 @@
         </p:nvSpPr>
         <p:spPr>
           <a:xfrm>
-            <a:off x="4572000" y="640080"/>
-            <a:ext cx="6492240" cy="5577840"/>
+            <a:off x="1389888" y="1508760"/>
+            <a:ext cx="9402775" cy="4846320"/>
           </a:xfrm>
         </p:spPr>
         <p:txBody>
@@ -4556,8 +4732,8 @@
         </p:nvSpPr>
         <p:spPr>
           <a:xfrm>
-            <a:off x="502920" y="6126480"/>
-            <a:ext cx="1097280" cy="457200"/>
+            <a:off x="0" y="320040"/>
+            <a:ext cx="1051560" cy="914400"/>
           </a:xfrm>
           <a:prstGeom prst="rect">
             <a:avLst/>
@@ -4570,16 +4746,60 @@
           </a:bodyPr>
           <a:lstStyle/>
           <a:p>
-            <a:pPr algn="l"/>
-            <a:r>
-              <a:rPr sz="1400" b="1" i="0">
+            <a:pPr algn="ctr"/>
+            <a:r>
+              <a:rPr sz="2600" b="1" i="0">
                 <a:solidFill>
                   <a:srgbClr val="FFFFFF"/>
                 </a:solidFill>
                 <a:latin typeface="Franklin Gothic Medium"/>
               </a:rPr>
-              <a:t>05</a:t>
-            </a:r>
+              <a:t>5</a:t>
+            </a:r>
+          </a:p>
+        </p:txBody>
+      </p:sp>
+      <p:sp>
+        <p:nvSpPr>
+          <p:cNvPr id="6" name="Rectangle 5"/>
+          <p:cNvSpPr/>
+          <p:nvPr/>
+        </p:nvSpPr>
+        <p:spPr>
+          <a:xfrm>
+            <a:off x="1389888" y="1325880"/>
+            <a:ext cx="2926080" cy="36576"/>
+          </a:xfrm>
+          <a:prstGeom prst="rect">
+            <a:avLst/>
+          </a:prstGeom>
+          <a:solidFill>
+            <a:srgbClr val="1F6FC0"/>
+          </a:solidFill>
+          <a:ln>
+            <a:noFill/>
+          </a:ln>
+          <a:effectLst/>
+        </p:spPr>
+        <p:style>
+          <a:lnRef idx="1">
+            <a:schemeClr val="accent1"/>
+          </a:lnRef>
+          <a:fillRef idx="3">
+            <a:schemeClr val="accent1"/>
+          </a:fillRef>
+          <a:effectRef idx="2">
+            <a:schemeClr val="accent1"/>
+          </a:effectRef>
+          <a:fontRef idx="minor">
+            <a:schemeClr val="lt1"/>
+          </a:fontRef>
+        </p:style>
+        <p:txBody>
+          <a:bodyPr rtlCol="0" anchor="ctr"/>
+          <a:lstStyle/>
+          <a:p>
+            <a:pPr algn="ctr"/>
           </a:p>
         </p:txBody>
       </p:sp>

--- a/ppt/cold-chain-logistics.pptx
+++ b/ppt/cold-chain-logistics.pptx
@@ -3108,7 +3108,7 @@
             <a:avLst/>
           </a:prstGeom>
           <a:solidFill>
-            <a:srgbClr val="1F6FC0"/>
+            <a:srgbClr val="2A7FB0"/>
           </a:solidFill>
           <a:ln>
             <a:noFill/>
@@ -3139,45 +3139,36 @@
       </p:sp>
       <p:sp>
         <p:nvSpPr>
-          <p:cNvPr id="3" name="Rectangle 2"/>
-          <p:cNvSpPr/>
+          <p:cNvPr id="3" name="TextBox 2"/>
+          <p:cNvSpPr txBox="1"/>
           <p:nvPr/>
         </p:nvSpPr>
         <p:spPr>
           <a:xfrm>
-            <a:off x="457200" y="457200"/>
-            <a:ext cx="11277295" cy="5943600"/>
+            <a:off x="914400" y="2011680"/>
+            <a:ext cx="10332720" cy="1783080"/>
           </a:xfrm>
           <a:prstGeom prst="rect">
             <a:avLst/>
           </a:prstGeom>
           <a:noFill/>
-          <a:ln w="19050">
-            <a:solidFill>
-              <a:srgbClr val="B0CCE8"/>
-            </a:solidFill>
-          </a:ln>
-          <a:effectLst/>
-        </p:spPr>
-        <p:style>
-          <a:lnRef idx="1">
-            <a:schemeClr val="accent1"/>
-          </a:lnRef>
-          <a:fillRef idx="3">
-            <a:schemeClr val="accent1"/>
-          </a:fillRef>
-          <a:effectRef idx="2">
-            <a:schemeClr val="accent1"/>
-          </a:effectRef>
-          <a:fontRef idx="minor">
-            <a:schemeClr val="lt1"/>
-          </a:fontRef>
-        </p:style>
-        <p:txBody>
-          <a:bodyPr rtlCol="0" anchor="ctr"/>
+        </p:spPr>
+        <p:txBody>
+          <a:bodyPr wrap="square" anchor="ctr">
+            <a:spAutoFit/>
+          </a:bodyPr>
           <a:lstStyle/>
           <a:p>
             <a:pPr algn="ctr"/>
+            <a:r>
+              <a:rPr sz="3400" b="1" i="0">
+                <a:solidFill>
+                  <a:srgbClr val="FFFFFF"/>
+                </a:solidFill>
+                <a:latin typeface="Cambria"/>
+              </a:rPr>
+              <a:t>Cold Chain Logistics Monitoring</a:t>
+            </a:r>
           </a:p>
         </p:txBody>
       </p:sp>
@@ -3189,8 +3180,8 @@
         </p:nvSpPr>
         <p:spPr>
           <a:xfrm>
-            <a:off x="1188720" y="2103120"/>
-            <a:ext cx="9784080" cy="1783080"/>
+            <a:off x="1371600" y="3840480"/>
+            <a:ext cx="9418320" cy="548640"/>
           </a:xfrm>
           <a:prstGeom prst="rect">
             <a:avLst/>
@@ -3198,20 +3189,20 @@
           <a:noFill/>
         </p:spPr>
         <p:txBody>
-          <a:bodyPr wrap="square" anchor="ctr">
+          <a:bodyPr wrap="square" anchor="t">
             <a:spAutoFit/>
           </a:bodyPr>
           <a:lstStyle/>
           <a:p>
             <a:pPr algn="ctr"/>
             <a:r>
-              <a:rPr sz="3400" b="1" i="0">
-                <a:solidFill>
-                  <a:srgbClr val="FFFFFF"/>
-                </a:solidFill>
-                <a:latin typeface="Franklin Gothic Medium"/>
+              <a:rPr sz="1800" b="0" i="1">
+                <a:solidFill>
+                  <a:srgbClr val="C3DBE8"/>
+                </a:solidFill>
+                <a:latin typeface="Calibri"/>
               </a:rPr>
-              <a:t>Cold Chain Logistics Monitoring</a:t>
+              <a:t>Ten container sensors, five risk signals, one live manifest</a:t>
             </a:r>
           </a:p>
         </p:txBody>
@@ -3224,8 +3215,8 @@
         </p:nvSpPr>
         <p:spPr>
           <a:xfrm>
-            <a:off x="1371600" y="3931920"/>
-            <a:ext cx="9418320" cy="548640"/>
+            <a:off x="1371600" y="4709160"/>
+            <a:ext cx="9418320" cy="1463040"/>
           </a:xfrm>
           <a:prstGeom prst="rect">
             <a:avLst/>
@@ -3240,44 +3231,9 @@
           <a:p>
             <a:pPr algn="ctr"/>
             <a:r>
-              <a:rPr sz="1700" b="0" i="1">
-                <a:solidFill>
-                  <a:srgbClr val="C0D6ED"/>
-                </a:solidFill>
-                <a:latin typeface="Calibri"/>
-              </a:rPr>
-              <a:t>Ten container sensors, five risk signals, one live manifest</a:t>
-            </a:r>
-          </a:p>
-        </p:txBody>
-      </p:sp>
-      <p:sp>
-        <p:nvSpPr>
-          <p:cNvPr id="6" name="TextBox 5"/>
-          <p:cNvSpPr txBox="1"/>
-          <p:nvPr/>
-        </p:nvSpPr>
-        <p:spPr>
-          <a:xfrm>
-            <a:off x="1371600" y="4800600"/>
-            <a:ext cx="9418320" cy="1280160"/>
-          </a:xfrm>
-          <a:prstGeom prst="rect">
-            <a:avLst/>
-          </a:prstGeom>
-          <a:noFill/>
-        </p:spPr>
-        <p:txBody>
-          <a:bodyPr wrap="square" anchor="t">
-            <a:spAutoFit/>
-          </a:bodyPr>
-          <a:lstStyle/>
-          <a:p>
-            <a:pPr algn="ctr"/>
-            <a:r>
               <a:rPr sz="1250" b="0" i="0">
                 <a:solidFill>
-                  <a:srgbClr val="A5C5E5"/>
+                  <a:srgbClr val="AECEE0"/>
                 </a:solidFill>
                 <a:latin typeface="Calibri"/>
               </a:rPr>
@@ -3289,7 +3245,7 @@
             <a:r>
               <a:rPr sz="1250" b="0" i="0">
                 <a:solidFill>
-                  <a:srgbClr val="A5C5E5"/>
+                  <a:srgbClr val="AECEE0"/>
                 </a:solidFill>
                 <a:latin typeface="Calibri"/>
               </a:rPr>
@@ -3318,20 +3274,188 @@
       <p:grpSpPr/>
       <p:sp>
         <p:nvSpPr>
+          <p:cNvPr id="2" name="Title 1"/>
+          <p:cNvSpPr>
+            <a:spLocks noGrp="1"/>
+          </p:cNvSpPr>
+          <p:nvPr>
+            <p:ph type="title"/>
+          </p:nvPr>
+        </p:nvSpPr>
+        <p:spPr>
+          <a:xfrm>
+            <a:off x="713232" y="731520"/>
+            <a:ext cx="10698480" cy="868680"/>
+          </a:xfrm>
+        </p:spPr>
+        <p:txBody>
+          <a:bodyPr wrap="square" anchor="t"/>
+          <a:lstStyle/>
+          <a:p>
+            <a:pPr algn="l"/>
+            <a:r>
+              <a:rPr b="1" sz="2700">
+                <a:solidFill>
+                  <a:srgbClr val="2A7FB0"/>
+                </a:solidFill>
+                <a:latin typeface="Cambria"/>
+              </a:rPr>
+              <a:t>Why periodic checking fails a cold chain</a:t>
+            </a:r>
+          </a:p>
+        </p:txBody>
+      </p:sp>
+      <p:sp>
+        <p:nvSpPr>
+          <p:cNvPr id="3" name="Content Placeholder 2"/>
+          <p:cNvSpPr>
+            <a:spLocks noGrp="1"/>
+          </p:cNvSpPr>
+          <p:nvPr>
+            <p:ph idx="1"/>
+          </p:nvPr>
+        </p:nvSpPr>
+        <p:spPr>
+          <a:xfrm>
+            <a:off x="713232" y="1737360"/>
+            <a:ext cx="10698480" cy="4526280"/>
+          </a:xfrm>
+        </p:spPr>
+        <p:txBody>
+          <a:bodyPr wrap="square">
+            <a:normAutofit/>
+          </a:bodyPr>
+          <a:lstStyle/>
+          <a:p>
+            <a:pPr>
+              <a:spcAft>
+                <a:spcPts val="900"/>
+              </a:spcAft>
+            </a:pPr>
+            <a:r>
+              <a:rPr sz="1700" b="0">
+                <a:solidFill>
+                  <a:srgbClr val="232A26"/>
+                </a:solidFill>
+                <a:latin typeface="Calibri"/>
+              </a:rPr>
+              <a:t>Cargo risk builds in seconds: a reefer container whose window-average temperature drifts above -15 C is already breaching the cold chain.</a:t>
+            </a:r>
+          </a:p>
+          <a:p>
+            <a:pPr>
+              <a:spcAft>
+                <a:spcPts val="900"/>
+              </a:spcAft>
+            </a:pPr>
+            <a:r>
+              <a:rPr sz="1700" b="0">
+                <a:solidFill>
+                  <a:srgbClr val="232A26"/>
+                </a:solidFill>
+                <a:latin typeface="Calibri"/>
+              </a:rPr>
+              <a:t>Every container carries five independent risk signals, storage temperature, humidity, door-open time, shock, and CO2, far more than a clipboard round can track.</a:t>
+            </a:r>
+          </a:p>
+          <a:p>
+            <a:pPr>
+              <a:spcAft>
+                <a:spcPts val="900"/>
+              </a:spcAft>
+            </a:pPr>
+            <a:r>
+              <a:rPr sz="1700" b="0">
+                <a:solidFill>
+                  <a:srgbClr val="232A26"/>
+                </a:solidFill>
+                <a:latin typeface="Calibri"/>
+              </a:rPr>
+              <a:t>A periodic or manual check discovers the breach after the damage is done, and nothing connects the door left open to the load that spoiled.</a:t>
+            </a:r>
+          </a:p>
+          <a:p>
+            <a:pPr>
+              <a:spcAft>
+                <a:spcPts val="900"/>
+              </a:spcAft>
+            </a:pPr>
+            <a:r>
+              <a:rPr sz="1700" b="0">
+                <a:solidFill>
+                  <a:srgbClr val="232A26"/>
+                </a:solidFill>
+                <a:latin typeface="Calibri"/>
+              </a:rPr>
+              <a:t>This project replaces the clipboard: sensors sample every 2-4 seconds and every container is re-scored every 10 seconds, continuously.</a:t>
+            </a:r>
+          </a:p>
+          <a:p>
+            <a:pPr>
+              <a:spcAft>
+                <a:spcPts val="900"/>
+              </a:spcAft>
+            </a:pPr>
+            <a:r>
+              <a:rPr sz="1700" b="0">
+                <a:solidFill>
+                  <a:srgbClr val="232A26"/>
+                </a:solidFill>
+                <a:latin typeface="Calibri"/>
+              </a:rPr>
+              <a:t>-15 C: window-average storage temperature that flags a cold-chain breach.</a:t>
+            </a:r>
+          </a:p>
+          <a:p>
+            <a:pPr>
+              <a:spcAft>
+                <a:spcPts val="900"/>
+              </a:spcAft>
+            </a:pPr>
+            <a:r>
+              <a:rPr sz="1700" b="0">
+                <a:solidFill>
+                  <a:srgbClr val="232A26"/>
+                </a:solidFill>
+                <a:latin typeface="Calibri"/>
+              </a:rPr>
+              <a:t>300 s: average door-open duration that raises an operational alert.</a:t>
+            </a:r>
+          </a:p>
+          <a:p>
+            <a:pPr>
+              <a:spcAft>
+                <a:spcPts val="900"/>
+              </a:spcAft>
+            </a:pPr>
+            <a:r>
+              <a:rPr sz="1700" b="0">
+                <a:solidFill>
+                  <a:srgbClr val="232A26"/>
+                </a:solidFill>
+                <a:latin typeface="Calibri"/>
+              </a:rPr>
+              <a:t>10 s: aggregation window, the longest an exception waits to surface.</a:t>
+            </a:r>
+          </a:p>
+        </p:txBody>
+      </p:sp>
+      <p:sp>
+        <p:nvSpPr>
           <p:cNvPr id="4" name="Rectangle 3"/>
           <p:cNvSpPr/>
           <p:nvPr/>
         </p:nvSpPr>
         <p:spPr>
           <a:xfrm>
-            <a:off x="0" y="0"/>
-            <a:ext cx="1051560" cy="6858000"/>
+            <a:off x="457200" y="457200"/>
+            <a:ext cx="2286000" cy="50292"/>
           </a:xfrm>
           <a:prstGeom prst="rect">
             <a:avLst/>
           </a:prstGeom>
           <a:solidFill>
-            <a:srgbClr val="1F6FC0"/>
+            <a:srgbClr val="2A7FB0"/>
           </a:solidFill>
           <a:ln>
             <a:noFill/>
@@ -3362,223 +3486,108 @@
       </p:sp>
       <p:sp>
         <p:nvSpPr>
-          <p:cNvPr id="2" name="Title 1"/>
-          <p:cNvSpPr>
-            <a:spLocks noGrp="1"/>
-          </p:cNvSpPr>
-          <p:nvPr>
-            <p:ph type="title"/>
-          </p:nvPr>
-        </p:nvSpPr>
-        <p:spPr>
-          <a:xfrm>
-            <a:off x="1371600" y="457200"/>
-            <a:ext cx="9311335" cy="868680"/>
-          </a:xfrm>
-        </p:spPr>
-        <p:txBody>
-          <a:bodyPr wrap="square" anchor="t"/>
-          <a:lstStyle/>
-          <a:p>
-            <a:pPr algn="l"/>
-            <a:r>
-              <a:rPr b="1" sz="2700">
-                <a:solidFill>
-                  <a:srgbClr val="1F6FC0"/>
-                </a:solidFill>
-                <a:latin typeface="Franklin Gothic Medium"/>
-              </a:rPr>
-              <a:t>Why periodic checking fails a cold chain</a:t>
-            </a:r>
-          </a:p>
-        </p:txBody>
-      </p:sp>
-      <p:sp>
-        <p:nvSpPr>
-          <p:cNvPr id="3" name="Content Placeholder 2"/>
-          <p:cNvSpPr>
-            <a:spLocks noGrp="1"/>
-          </p:cNvSpPr>
-          <p:nvPr>
-            <p:ph idx="1"/>
-          </p:nvPr>
-        </p:nvSpPr>
-        <p:spPr>
-          <a:xfrm>
-            <a:off x="1389888" y="1508760"/>
-            <a:ext cx="9402775" cy="4846320"/>
-          </a:xfrm>
-        </p:spPr>
-        <p:txBody>
-          <a:bodyPr wrap="square">
-            <a:normAutofit/>
-          </a:bodyPr>
-          <a:lstStyle/>
-          <a:p>
-            <a:pPr>
-              <a:spcAft>
-                <a:spcPts val="900"/>
-              </a:spcAft>
-            </a:pPr>
-            <a:r>
-              <a:rPr sz="1700" b="0">
-                <a:solidFill>
-                  <a:srgbClr val="232A26"/>
-                </a:solidFill>
-                <a:latin typeface="Calibri"/>
-              </a:rPr>
-              <a:t>Cargo risk builds in seconds: a reefer container whose window-average temperature drifts above -15 C is already breaching the cold chain.</a:t>
-            </a:r>
-          </a:p>
-          <a:p>
-            <a:pPr>
-              <a:spcAft>
-                <a:spcPts val="900"/>
-              </a:spcAft>
-            </a:pPr>
-            <a:r>
-              <a:rPr sz="1700" b="0">
-                <a:solidFill>
-                  <a:srgbClr val="232A26"/>
-                </a:solidFill>
-                <a:latin typeface="Calibri"/>
-              </a:rPr>
-              <a:t>Every container carries five independent risk signals, storage temperature, humidity, door-open time, shock, and CO2, far more than a clipboard round can track.</a:t>
-            </a:r>
-          </a:p>
-          <a:p>
-            <a:pPr>
-              <a:spcAft>
-                <a:spcPts val="900"/>
-              </a:spcAft>
-            </a:pPr>
-            <a:r>
-              <a:rPr sz="1700" b="0">
-                <a:solidFill>
-                  <a:srgbClr val="232A26"/>
-                </a:solidFill>
-                <a:latin typeface="Calibri"/>
-              </a:rPr>
-              <a:t>A periodic or manual check discovers the breach after the damage is done, and nothing connects the door left open to the load that spoiled.</a:t>
-            </a:r>
-          </a:p>
-          <a:p>
-            <a:pPr>
-              <a:spcAft>
-                <a:spcPts val="900"/>
-              </a:spcAft>
-            </a:pPr>
-            <a:r>
-              <a:rPr sz="1700" b="1">
-                <a:solidFill>
-                  <a:srgbClr val="1F6FC0"/>
-                </a:solidFill>
-                <a:latin typeface="Calibri"/>
-              </a:rPr>
-              <a:t>This project replaces the clipboard: sensors sample every 2-4 seconds and every container is re-scored every 10 seconds, continuously.</a:t>
-            </a:r>
-          </a:p>
-          <a:p>
-            <a:pPr>
-              <a:spcAft>
-                <a:spcPts val="900"/>
-              </a:spcAft>
-            </a:pPr>
-            <a:r>
-              <a:rPr sz="1700" b="0">
-                <a:solidFill>
-                  <a:srgbClr val="232A26"/>
-                </a:solidFill>
-                <a:latin typeface="Calibri"/>
-              </a:rPr>
-              <a:t>-15 C: window-average storage temperature that flags a cold-chain breach.</a:t>
-            </a:r>
-          </a:p>
-          <a:p>
-            <a:pPr>
-              <a:spcAft>
-                <a:spcPts val="900"/>
-              </a:spcAft>
-            </a:pPr>
-            <a:r>
-              <a:rPr sz="1700" b="0">
-                <a:solidFill>
-                  <a:srgbClr val="232A26"/>
-                </a:solidFill>
-                <a:latin typeface="Calibri"/>
-              </a:rPr>
-              <a:t>300 s: average door-open duration that raises an operational alert.</a:t>
-            </a:r>
-          </a:p>
-          <a:p>
-            <a:pPr>
-              <a:spcAft>
-                <a:spcPts val="900"/>
-              </a:spcAft>
-            </a:pPr>
-            <a:r>
-              <a:rPr sz="1700" b="0">
-                <a:solidFill>
-                  <a:srgbClr val="232A26"/>
-                </a:solidFill>
-                <a:latin typeface="Calibri"/>
-              </a:rPr>
-              <a:t>10 s: aggregation window, the longest an exception waits to surface.</a:t>
-            </a:r>
-          </a:p>
-        </p:txBody>
-      </p:sp>
-      <p:sp>
-        <p:nvSpPr>
-          <p:cNvPr id="5" name="TextBox 4"/>
-          <p:cNvSpPr txBox="1"/>
-          <p:nvPr/>
-        </p:nvSpPr>
-        <p:spPr>
-          <a:xfrm>
-            <a:off x="0" y="320040"/>
-            <a:ext cx="1051560" cy="914400"/>
-          </a:xfrm>
-          <a:prstGeom prst="rect">
-            <a:avLst/>
-          </a:prstGeom>
-          <a:noFill/>
-        </p:spPr>
-        <p:txBody>
-          <a:bodyPr wrap="square" anchor="t">
-            <a:spAutoFit/>
-          </a:bodyPr>
-          <a:lstStyle/>
-          <a:p>
-            <a:pPr algn="ctr"/>
-            <a:r>
-              <a:rPr sz="2600" b="1" i="0">
-                <a:solidFill>
-                  <a:srgbClr val="FFFFFF"/>
-                </a:solidFill>
-                <a:latin typeface="Franklin Gothic Medium"/>
-              </a:rPr>
-              <a:t>1</a:t>
-            </a:r>
-          </a:p>
-        </p:txBody>
-      </p:sp>
-      <p:sp>
-        <p:nvSpPr>
-          <p:cNvPr id="6" name="Rectangle 5"/>
+          <p:cNvPr id="5" name="Rectangle 4"/>
           <p:cNvSpPr/>
           <p:nvPr/>
         </p:nvSpPr>
         <p:spPr>
           <a:xfrm>
-            <a:off x="1389888" y="1325880"/>
-            <a:ext cx="2926080" cy="36576"/>
+            <a:off x="457200" y="457200"/>
+            <a:ext cx="50292" cy="1325880"/>
           </a:xfrm>
           <a:prstGeom prst="rect">
             <a:avLst/>
           </a:prstGeom>
           <a:solidFill>
-            <a:srgbClr val="1F6FC0"/>
+            <a:srgbClr val="2A7FB0"/>
+          </a:solidFill>
+          <a:ln>
+            <a:noFill/>
+          </a:ln>
+          <a:effectLst/>
+        </p:spPr>
+        <p:style>
+          <a:lnRef idx="1">
+            <a:schemeClr val="accent1"/>
+          </a:lnRef>
+          <a:fillRef idx="3">
+            <a:schemeClr val="accent1"/>
+          </a:fillRef>
+          <a:effectRef idx="2">
+            <a:schemeClr val="accent1"/>
+          </a:effectRef>
+          <a:fontRef idx="minor">
+            <a:schemeClr val="lt1"/>
+          </a:fontRef>
+        </p:style>
+        <p:txBody>
+          <a:bodyPr rtlCol="0" anchor="ctr"/>
+          <a:lstStyle/>
+          <a:p>
+            <a:pPr algn="ctr"/>
+          </a:p>
+        </p:txBody>
+      </p:sp>
+      <p:sp>
+        <p:nvSpPr>
+          <p:cNvPr id="6" name="Rectangle 5"/>
+          <p:cNvSpPr/>
+          <p:nvPr/>
+        </p:nvSpPr>
+        <p:spPr>
+          <a:xfrm>
+            <a:off x="9445752" y="6355080"/>
+            <a:ext cx="2286000" cy="50292"/>
+          </a:xfrm>
+          <a:prstGeom prst="rect">
+            <a:avLst/>
+          </a:prstGeom>
+          <a:solidFill>
+            <a:srgbClr val="2A7FB0"/>
+          </a:solidFill>
+          <a:ln>
+            <a:noFill/>
+          </a:ln>
+          <a:effectLst/>
+        </p:spPr>
+        <p:style>
+          <a:lnRef idx="1">
+            <a:schemeClr val="accent1"/>
+          </a:lnRef>
+          <a:fillRef idx="3">
+            <a:schemeClr val="accent1"/>
+          </a:fillRef>
+          <a:effectRef idx="2">
+            <a:schemeClr val="accent1"/>
+          </a:effectRef>
+          <a:fontRef idx="minor">
+            <a:schemeClr val="lt1"/>
+          </a:fontRef>
+        </p:style>
+        <p:txBody>
+          <a:bodyPr rtlCol="0" anchor="ctr"/>
+          <a:lstStyle/>
+          <a:p>
+            <a:pPr algn="ctr"/>
+          </a:p>
+        </p:txBody>
+      </p:sp>
+      <p:sp>
+        <p:nvSpPr>
+          <p:cNvPr id="7" name="Rectangle 6"/>
+          <p:cNvSpPr/>
+          <p:nvPr/>
+        </p:nvSpPr>
+        <p:spPr>
+          <a:xfrm>
+            <a:off x="11686032" y="5074920"/>
+            <a:ext cx="50292" cy="1325880"/>
+          </a:xfrm>
+          <a:prstGeom prst="rect">
+            <a:avLst/>
+          </a:prstGeom>
+          <a:solidFill>
+            <a:srgbClr val="2A7FB0"/>
           </a:solidFill>
           <a:ln>
             <a:noFill/>
@@ -3627,20 +3636,188 @@
       <p:grpSpPr/>
       <p:sp>
         <p:nvSpPr>
+          <p:cNvPr id="2" name="Title 1"/>
+          <p:cNvSpPr>
+            <a:spLocks noGrp="1"/>
+          </p:cNvSpPr>
+          <p:nvPr>
+            <p:ph type="title"/>
+          </p:nvPr>
+        </p:nvSpPr>
+        <p:spPr>
+          <a:xfrm>
+            <a:off x="713232" y="731520"/>
+            <a:ext cx="10698480" cy="868680"/>
+          </a:xfrm>
+        </p:spPr>
+        <p:txBody>
+          <a:bodyPr wrap="square" anchor="t"/>
+          <a:lstStyle/>
+          <a:p>
+            <a:pPr algn="l"/>
+            <a:r>
+              <a:rPr b="1" sz="2700">
+                <a:solidFill>
+                  <a:srgbClr val="2A7FB0"/>
+                </a:solidFill>
+                <a:latin typeface="Cambria"/>
+              </a:rPr>
+              <a:t>How it works: sensors to live manifest</a:t>
+            </a:r>
+          </a:p>
+        </p:txBody>
+      </p:sp>
+      <p:sp>
+        <p:nvSpPr>
+          <p:cNvPr id="3" name="Content Placeholder 2"/>
+          <p:cNvSpPr>
+            <a:spLocks noGrp="1"/>
+          </p:cNvSpPr>
+          <p:nvPr>
+            <p:ph idx="1"/>
+          </p:nvPr>
+        </p:nvSpPr>
+        <p:spPr>
+          <a:xfrm>
+            <a:off x="713232" y="1737360"/>
+            <a:ext cx="10698480" cy="4526280"/>
+          </a:xfrm>
+        </p:spPr>
+        <p:txBody>
+          <a:bodyPr wrap="square">
+            <a:normAutofit/>
+          </a:bodyPr>
+          <a:lstStyle/>
+          <a:p>
+            <a:pPr>
+              <a:spcAft>
+                <a:spcPts val="900"/>
+              </a:spcAft>
+            </a:pPr>
+            <a:r>
+              <a:rPr sz="1700" b="0">
+                <a:solidFill>
+                  <a:srgbClr val="232A26"/>
+                </a:solidFill>
+                <a:latin typeface="Calibri"/>
+              </a:rPr>
+              <a:t>Container sensors: 10 simulated units, 5 reading types across 2 containers, 2-4 second sampling.</a:t>
+            </a:r>
+          </a:p>
+          <a:p>
+            <a:pPr>
+              <a:spcAft>
+                <a:spcPts val="900"/>
+              </a:spcAft>
+            </a:pPr>
+            <a:r>
+              <a:rPr sz="1700" b="0">
+                <a:solidFill>
+                  <a:srgbClr val="232A26"/>
+                </a:solidFill>
+                <a:latin typeface="Calibri"/>
+              </a:rPr>
+              <a:t>Depot relay (fog node): 10-second windows aggregate each reading type and flag exceptions.</a:t>
+            </a:r>
+          </a:p>
+          <a:p>
+            <a:pPr>
+              <a:spcAft>
+                <a:spcPts val="900"/>
+              </a:spcAft>
+            </a:pPr>
+            <a:r>
+              <a:rPr sz="1700" b="0">
+                <a:solidFill>
+                  <a:srgbClr val="232A26"/>
+                </a:solidFill>
+                <a:latin typeface="Calibri"/>
+              </a:rPr>
+              <a:t>Amazon SQS: one aggregate per window, shipped in batches of up to 10 messages.</a:t>
+            </a:r>
+          </a:p>
+          <a:p>
+            <a:pPr>
+              <a:spcAft>
+                <a:spcPts val="900"/>
+              </a:spcAft>
+            </a:pPr>
+            <a:r>
+              <a:rPr sz="1700" b="0">
+                <a:solidFill>
+                  <a:srgbClr val="232A26"/>
+                </a:solidFill>
+                <a:latin typeface="Calibri"/>
+              </a:rPr>
+              <a:t>AWS Lambda: consumes the queue and reshapes every record for storage.</a:t>
+            </a:r>
+          </a:p>
+          <a:p>
+            <a:pPr>
+              <a:spcAft>
+                <a:spcPts val="900"/>
+              </a:spcAft>
+            </a:pPr>
+            <a:r>
+              <a:rPr sz="1700" b="0">
+                <a:solidFill>
+                  <a:srgbClr val="232A26"/>
+                </a:solidFill>
+                <a:latin typeface="Calibri"/>
+              </a:rPr>
+              <a:t>Amazon DynamoDB: durable archive of every window record, keyed per reading type.</a:t>
+            </a:r>
+          </a:p>
+          <a:p>
+            <a:pPr>
+              <a:spcAft>
+                <a:spcPts val="900"/>
+              </a:spcAft>
+            </a:pPr>
+            <a:r>
+              <a:rPr sz="1700" b="0">
+                <a:solidFill>
+                  <a:srgbClr val="232A26"/>
+                </a:solidFill>
+                <a:latin typeface="Calibri"/>
+              </a:rPr>
+              <a:t>Live dashboard: manifest table and temperature trends, served by API Gateway and Amazon S3 on AWS.</a:t>
+            </a:r>
+          </a:p>
+          <a:p>
+            <a:pPr>
+              <a:spcAft>
+                <a:spcPts val="900"/>
+              </a:spcAft>
+            </a:pPr>
+            <a:r>
+              <a:rPr sz="1700" b="0">
+                <a:solidFill>
+                  <a:srgbClr val="232A26"/>
+                </a:solidFill>
+                <a:latin typeface="Calibri"/>
+              </a:rPr>
+              <a:t>Verified end-to-end on Docker with an AWS emulator standing in for SQS, Lambda and DynamoDB: a pipeline script polls until every reading type lands in the store. The same code targets real AWS as a configuration change and deploys in a single scripted step.</a:t>
+            </a:r>
+          </a:p>
+        </p:txBody>
+      </p:sp>
+      <p:sp>
+        <p:nvSpPr>
           <p:cNvPr id="4" name="Rectangle 3"/>
           <p:cNvSpPr/>
           <p:nvPr/>
         </p:nvSpPr>
         <p:spPr>
           <a:xfrm>
-            <a:off x="0" y="0"/>
-            <a:ext cx="1051560" cy="6858000"/>
+            <a:off x="457200" y="457200"/>
+            <a:ext cx="2286000" cy="50292"/>
           </a:xfrm>
           <a:prstGeom prst="rect">
             <a:avLst/>
           </a:prstGeom>
           <a:solidFill>
-            <a:srgbClr val="1F6FC0"/>
+            <a:srgbClr val="2A7FB0"/>
           </a:solidFill>
           <a:ln>
             <a:noFill/>
@@ -3671,223 +3848,108 @@
       </p:sp>
       <p:sp>
         <p:nvSpPr>
-          <p:cNvPr id="2" name="Title 1"/>
-          <p:cNvSpPr>
-            <a:spLocks noGrp="1"/>
-          </p:cNvSpPr>
-          <p:nvPr>
-            <p:ph type="title"/>
-          </p:nvPr>
-        </p:nvSpPr>
-        <p:spPr>
-          <a:xfrm>
-            <a:off x="1371600" y="457200"/>
-            <a:ext cx="9311335" cy="868680"/>
-          </a:xfrm>
-        </p:spPr>
-        <p:txBody>
-          <a:bodyPr wrap="square" anchor="t"/>
-          <a:lstStyle/>
-          <a:p>
-            <a:pPr algn="l"/>
-            <a:r>
-              <a:rPr b="1" sz="2700">
-                <a:solidFill>
-                  <a:srgbClr val="1F6FC0"/>
-                </a:solidFill>
-                <a:latin typeface="Franklin Gothic Medium"/>
-              </a:rPr>
-              <a:t>How it works: sensors to live manifest</a:t>
-            </a:r>
-          </a:p>
-        </p:txBody>
-      </p:sp>
-      <p:sp>
-        <p:nvSpPr>
-          <p:cNvPr id="3" name="Content Placeholder 2"/>
-          <p:cNvSpPr>
-            <a:spLocks noGrp="1"/>
-          </p:cNvSpPr>
-          <p:nvPr>
-            <p:ph idx="1"/>
-          </p:nvPr>
-        </p:nvSpPr>
-        <p:spPr>
-          <a:xfrm>
-            <a:off x="1389888" y="1508760"/>
-            <a:ext cx="9402775" cy="4846320"/>
-          </a:xfrm>
-        </p:spPr>
-        <p:txBody>
-          <a:bodyPr wrap="square">
-            <a:normAutofit/>
-          </a:bodyPr>
-          <a:lstStyle/>
-          <a:p>
-            <a:pPr>
-              <a:spcAft>
-                <a:spcPts val="900"/>
-              </a:spcAft>
-            </a:pPr>
-            <a:r>
-              <a:rPr sz="1700" b="0">
-                <a:solidFill>
-                  <a:srgbClr val="232A26"/>
-                </a:solidFill>
-                <a:latin typeface="Calibri"/>
-              </a:rPr>
-              <a:t>Container sensors: 10 simulated units, 5 reading types across 2 containers, 2-4 second sampling.</a:t>
-            </a:r>
-          </a:p>
-          <a:p>
-            <a:pPr>
-              <a:spcAft>
-                <a:spcPts val="900"/>
-              </a:spcAft>
-            </a:pPr>
-            <a:r>
-              <a:rPr sz="1700" b="0">
-                <a:solidFill>
-                  <a:srgbClr val="232A26"/>
-                </a:solidFill>
-                <a:latin typeface="Calibri"/>
-              </a:rPr>
-              <a:t>Depot relay (fog node): 10-second windows aggregate each reading type and flag exceptions.</a:t>
-            </a:r>
-          </a:p>
-          <a:p>
-            <a:pPr>
-              <a:spcAft>
-                <a:spcPts val="900"/>
-              </a:spcAft>
-            </a:pPr>
-            <a:r>
-              <a:rPr sz="1700" b="0">
-                <a:solidFill>
-                  <a:srgbClr val="232A26"/>
-                </a:solidFill>
-                <a:latin typeface="Calibri"/>
-              </a:rPr>
-              <a:t>Amazon SQS: one aggregate per window, shipped in batches of up to 10 messages.</a:t>
-            </a:r>
-          </a:p>
-          <a:p>
-            <a:pPr>
-              <a:spcAft>
-                <a:spcPts val="900"/>
-              </a:spcAft>
-            </a:pPr>
-            <a:r>
-              <a:rPr sz="1700" b="0">
-                <a:solidFill>
-                  <a:srgbClr val="232A26"/>
-                </a:solidFill>
-                <a:latin typeface="Calibri"/>
-              </a:rPr>
-              <a:t>AWS Lambda: consumes the queue and reshapes every record for storage.</a:t>
-            </a:r>
-          </a:p>
-          <a:p>
-            <a:pPr>
-              <a:spcAft>
-                <a:spcPts val="900"/>
-              </a:spcAft>
-            </a:pPr>
-            <a:r>
-              <a:rPr sz="1700" b="0">
-                <a:solidFill>
-                  <a:srgbClr val="232A26"/>
-                </a:solidFill>
-                <a:latin typeface="Calibri"/>
-              </a:rPr>
-              <a:t>Amazon DynamoDB: durable archive of every window record, keyed per reading type.</a:t>
-            </a:r>
-          </a:p>
-          <a:p>
-            <a:pPr>
-              <a:spcAft>
-                <a:spcPts val="900"/>
-              </a:spcAft>
-            </a:pPr>
-            <a:r>
-              <a:rPr sz="1700" b="0">
-                <a:solidFill>
-                  <a:srgbClr val="232A26"/>
-                </a:solidFill>
-                <a:latin typeface="Calibri"/>
-              </a:rPr>
-              <a:t>Live dashboard: manifest table and temperature trends, served by API Gateway and Amazon S3 on AWS.</a:t>
-            </a:r>
-          </a:p>
-          <a:p>
-            <a:pPr>
-              <a:spcAft>
-                <a:spcPts val="900"/>
-              </a:spcAft>
-            </a:pPr>
-            <a:r>
-              <a:rPr sz="1700" b="1">
-                <a:solidFill>
-                  <a:srgbClr val="1F6FC0"/>
-                </a:solidFill>
-                <a:latin typeface="Calibri"/>
-              </a:rPr>
-              <a:t>Verified end-to-end on Docker with an AWS emulator standing in for SQS, Lambda and DynamoDB: a pipeline script polls until every reading type lands in the store. The same code targets real AWS as a configuration change and deploys in a single scripted step.</a:t>
-            </a:r>
-          </a:p>
-        </p:txBody>
-      </p:sp>
-      <p:sp>
-        <p:nvSpPr>
-          <p:cNvPr id="5" name="TextBox 4"/>
-          <p:cNvSpPr txBox="1"/>
-          <p:nvPr/>
-        </p:nvSpPr>
-        <p:spPr>
-          <a:xfrm>
-            <a:off x="0" y="320040"/>
-            <a:ext cx="1051560" cy="914400"/>
-          </a:xfrm>
-          <a:prstGeom prst="rect">
-            <a:avLst/>
-          </a:prstGeom>
-          <a:noFill/>
-        </p:spPr>
-        <p:txBody>
-          <a:bodyPr wrap="square" anchor="t">
-            <a:spAutoFit/>
-          </a:bodyPr>
-          <a:lstStyle/>
-          <a:p>
-            <a:pPr algn="ctr"/>
-            <a:r>
-              <a:rPr sz="2600" b="1" i="0">
-                <a:solidFill>
-                  <a:srgbClr val="FFFFFF"/>
-                </a:solidFill>
-                <a:latin typeface="Franklin Gothic Medium"/>
-              </a:rPr>
-              <a:t>2</a:t>
-            </a:r>
-          </a:p>
-        </p:txBody>
-      </p:sp>
-      <p:sp>
-        <p:nvSpPr>
-          <p:cNvPr id="6" name="Rectangle 5"/>
+          <p:cNvPr id="5" name="Rectangle 4"/>
           <p:cNvSpPr/>
           <p:nvPr/>
         </p:nvSpPr>
         <p:spPr>
           <a:xfrm>
-            <a:off x="1389888" y="1325880"/>
-            <a:ext cx="2926080" cy="36576"/>
+            <a:off x="457200" y="457200"/>
+            <a:ext cx="50292" cy="1325880"/>
           </a:xfrm>
           <a:prstGeom prst="rect">
             <a:avLst/>
           </a:prstGeom>
           <a:solidFill>
-            <a:srgbClr val="1F6FC0"/>
+            <a:srgbClr val="2A7FB0"/>
+          </a:solidFill>
+          <a:ln>
+            <a:noFill/>
+          </a:ln>
+          <a:effectLst/>
+        </p:spPr>
+        <p:style>
+          <a:lnRef idx="1">
+            <a:schemeClr val="accent1"/>
+          </a:lnRef>
+          <a:fillRef idx="3">
+            <a:schemeClr val="accent1"/>
+          </a:fillRef>
+          <a:effectRef idx="2">
+            <a:schemeClr val="accent1"/>
+          </a:effectRef>
+          <a:fontRef idx="minor">
+            <a:schemeClr val="lt1"/>
+          </a:fontRef>
+        </p:style>
+        <p:txBody>
+          <a:bodyPr rtlCol="0" anchor="ctr"/>
+          <a:lstStyle/>
+          <a:p>
+            <a:pPr algn="ctr"/>
+          </a:p>
+        </p:txBody>
+      </p:sp>
+      <p:sp>
+        <p:nvSpPr>
+          <p:cNvPr id="6" name="Rectangle 5"/>
+          <p:cNvSpPr/>
+          <p:nvPr/>
+        </p:nvSpPr>
+        <p:spPr>
+          <a:xfrm>
+            <a:off x="9445752" y="6355080"/>
+            <a:ext cx="2286000" cy="50292"/>
+          </a:xfrm>
+          <a:prstGeom prst="rect">
+            <a:avLst/>
+          </a:prstGeom>
+          <a:solidFill>
+            <a:srgbClr val="2A7FB0"/>
+          </a:solidFill>
+          <a:ln>
+            <a:noFill/>
+          </a:ln>
+          <a:effectLst/>
+        </p:spPr>
+        <p:style>
+          <a:lnRef idx="1">
+            <a:schemeClr val="accent1"/>
+          </a:lnRef>
+          <a:fillRef idx="3">
+            <a:schemeClr val="accent1"/>
+          </a:fillRef>
+          <a:effectRef idx="2">
+            <a:schemeClr val="accent1"/>
+          </a:effectRef>
+          <a:fontRef idx="minor">
+            <a:schemeClr val="lt1"/>
+          </a:fontRef>
+        </p:style>
+        <p:txBody>
+          <a:bodyPr rtlCol="0" anchor="ctr"/>
+          <a:lstStyle/>
+          <a:p>
+            <a:pPr algn="ctr"/>
+          </a:p>
+        </p:txBody>
+      </p:sp>
+      <p:sp>
+        <p:nvSpPr>
+          <p:cNvPr id="7" name="Rectangle 6"/>
+          <p:cNvSpPr/>
+          <p:nvPr/>
+        </p:nvSpPr>
+        <p:spPr>
+          <a:xfrm>
+            <a:off x="11686032" y="5074920"/>
+            <a:ext cx="50292" cy="1325880"/>
+          </a:xfrm>
+          <a:prstGeom prst="rect">
+            <a:avLst/>
+          </a:prstGeom>
+          <a:solidFill>
+            <a:srgbClr val="2A7FB0"/>
           </a:solidFill>
           <a:ln>
             <a:noFill/>
@@ -3936,20 +3998,156 @@
       <p:grpSpPr/>
       <p:sp>
         <p:nvSpPr>
+          <p:cNvPr id="2" name="Title 1"/>
+          <p:cNvSpPr>
+            <a:spLocks noGrp="1"/>
+          </p:cNvSpPr>
+          <p:nvPr>
+            <p:ph type="title"/>
+          </p:nvPr>
+        </p:nvSpPr>
+        <p:spPr>
+          <a:xfrm>
+            <a:off x="713232" y="731520"/>
+            <a:ext cx="10698480" cy="868680"/>
+          </a:xfrm>
+        </p:spPr>
+        <p:txBody>
+          <a:bodyPr wrap="square" anchor="t"/>
+          <a:lstStyle/>
+          <a:p>
+            <a:pPr algn="l"/>
+            <a:r>
+              <a:rPr b="1" sz="2700">
+                <a:solidFill>
+                  <a:srgbClr val="2A7FB0"/>
+                </a:solidFill>
+                <a:latin typeface="Cambria"/>
+              </a:rPr>
+              <a:t>Demonstration highlights</a:t>
+            </a:r>
+          </a:p>
+        </p:txBody>
+      </p:sp>
+      <p:sp>
+        <p:nvSpPr>
+          <p:cNvPr id="3" name="Content Placeholder 2"/>
+          <p:cNvSpPr>
+            <a:spLocks noGrp="1"/>
+          </p:cNvSpPr>
+          <p:nvPr>
+            <p:ph idx="1"/>
+          </p:nvPr>
+        </p:nvSpPr>
+        <p:spPr>
+          <a:xfrm>
+            <a:off x="713232" y="1737360"/>
+            <a:ext cx="5669280" cy="4434840"/>
+          </a:xfrm>
+        </p:spPr>
+        <p:txBody>
+          <a:bodyPr wrap="square">
+            <a:normAutofit/>
+          </a:bodyPr>
+          <a:lstStyle/>
+          <a:p>
+            <a:pPr>
+              <a:spcAft>
+                <a:spcPts val="800"/>
+              </a:spcAft>
+            </a:pPr>
+            <a:r>
+              <a:rPr sz="1500" b="0">
+                <a:solidFill>
+                  <a:srgbClr val="232A26"/>
+                </a:solidFill>
+                <a:latin typeface="Calibri"/>
+              </a:rPr>
+              <a:t>Dashboard captured from the running stack: the per-container manifest, storage-temperature trends, and the pipeline status strip showing depot relay online, queue reachable, Lambda deployed, and records archived.</a:t>
+            </a:r>
+          </a:p>
+          <a:p>
+            <a:pPr>
+              <a:spcAft>
+                <a:spcPts val="800"/>
+              </a:spcAft>
+            </a:pPr>
+            <a:r>
+              <a:rPr sz="1500" b="0">
+                <a:solidFill>
+                  <a:srgbClr val="232A26"/>
+                </a:solidFill>
+                <a:latin typeface="Calibri"/>
+              </a:rPr>
+              <a:t>Exceptions fire live: any container whose window-average temperature rises above -15 C is flagged on the board within 10 seconds.</a:t>
+            </a:r>
+          </a:p>
+          <a:p>
+            <a:pPr>
+              <a:spcAft>
+                <a:spcPts val="800"/>
+              </a:spcAft>
+            </a:pPr>
+            <a:r>
+              <a:rPr sz="1500" b="0">
+                <a:solidFill>
+                  <a:srgbClr val="232A26"/>
+                </a:solidFill>
+                <a:latin typeface="Calibri"/>
+              </a:rPr>
+              <a:t>Health checks all green: depot relay online, queue reachable, Lambda deployed, and records archived climbing.</a:t>
+            </a:r>
+          </a:p>
+          <a:p>
+            <a:pPr>
+              <a:spcAft>
+                <a:spcPts val="800"/>
+              </a:spcAft>
+            </a:pPr>
+            <a:r>
+              <a:rPr sz="1500" b="0">
+                <a:solidFill>
+                  <a:srgbClr val="232A26"/>
+                </a:solidFill>
+                <a:latin typeface="Calibri"/>
+              </a:rPr>
+              <a:t>76 automated tests: unit and endpoint tests across 10 modules, run with pytest.</a:t>
+            </a:r>
+          </a:p>
+          <a:p>
+            <a:pPr>
+              <a:spcAft>
+                <a:spcPts val="800"/>
+              </a:spcAft>
+            </a:pPr>
+            <a:r>
+              <a:rPr sz="1500" b="0">
+                <a:solidFill>
+                  <a:srgbClr val="232A26"/>
+                </a:solidFill>
+                <a:latin typeface="Calibri"/>
+              </a:rPr>
+              <a:t>2,000-message burst absorbed: 32 parallel workers, batched 10 per SQS call, with live dashboard data untouched.</a:t>
+            </a:r>
+          </a:p>
+        </p:txBody>
+      </p:sp>
+      <p:sp>
+        <p:nvSpPr>
           <p:cNvPr id="4" name="Rectangle 3"/>
           <p:cNvSpPr/>
           <p:nvPr/>
         </p:nvSpPr>
         <p:spPr>
           <a:xfrm>
-            <a:off x="0" y="0"/>
-            <a:ext cx="1051560" cy="6858000"/>
+            <a:off x="457200" y="457200"/>
+            <a:ext cx="2286000" cy="50292"/>
           </a:xfrm>
           <a:prstGeom prst="rect">
             <a:avLst/>
           </a:prstGeom>
           <a:solidFill>
-            <a:srgbClr val="1F6FC0"/>
+            <a:srgbClr val="2A7FB0"/>
           </a:solidFill>
           <a:ln>
             <a:noFill/>
@@ -3980,191 +4178,20 @@
       </p:sp>
       <p:sp>
         <p:nvSpPr>
-          <p:cNvPr id="2" name="Title 1"/>
-          <p:cNvSpPr>
-            <a:spLocks noGrp="1"/>
-          </p:cNvSpPr>
-          <p:nvPr>
-            <p:ph type="title"/>
-          </p:nvPr>
-        </p:nvSpPr>
-        <p:spPr>
-          <a:xfrm>
-            <a:off x="1371600" y="457200"/>
-            <a:ext cx="9311335" cy="868680"/>
-          </a:xfrm>
-        </p:spPr>
-        <p:txBody>
-          <a:bodyPr wrap="square" anchor="t"/>
-          <a:lstStyle/>
-          <a:p>
-            <a:pPr algn="l"/>
-            <a:r>
-              <a:rPr b="1" sz="2700">
-                <a:solidFill>
-                  <a:srgbClr val="1F6FC0"/>
-                </a:solidFill>
-                <a:latin typeface="Franklin Gothic Medium"/>
-              </a:rPr>
-              <a:t>Demonstration highlights</a:t>
-            </a:r>
-          </a:p>
-        </p:txBody>
-      </p:sp>
-      <p:sp>
-        <p:nvSpPr>
-          <p:cNvPr id="3" name="Content Placeholder 2"/>
-          <p:cNvSpPr>
-            <a:spLocks noGrp="1"/>
-          </p:cNvSpPr>
-          <p:nvPr>
-            <p:ph idx="1"/>
-          </p:nvPr>
-        </p:nvSpPr>
-        <p:spPr>
-          <a:xfrm>
-            <a:off x="1389888" y="1508760"/>
-            <a:ext cx="5394960" cy="4754880"/>
-          </a:xfrm>
-        </p:spPr>
-        <p:txBody>
-          <a:bodyPr wrap="square">
-            <a:normAutofit/>
-          </a:bodyPr>
-          <a:lstStyle/>
-          <a:p>
-            <a:pPr>
-              <a:spcAft>
-                <a:spcPts val="800"/>
-              </a:spcAft>
-            </a:pPr>
-            <a:r>
-              <a:rPr sz="1500" b="0">
-                <a:solidFill>
-                  <a:srgbClr val="232A26"/>
-                </a:solidFill>
-                <a:latin typeface="Calibri"/>
-              </a:rPr>
-              <a:t>Dashboard captured from the running stack: the per-container manifest, storage-temperature trends, and the pipeline status strip showing depot relay online, queue reachable, Lambda deployed, and records archived.</a:t>
-            </a:r>
-          </a:p>
-          <a:p>
-            <a:pPr>
-              <a:spcAft>
-                <a:spcPts val="800"/>
-              </a:spcAft>
-            </a:pPr>
-            <a:r>
-              <a:rPr sz="1500" b="1">
-                <a:solidFill>
-                  <a:srgbClr val="1F6FC0"/>
-                </a:solidFill>
-                <a:latin typeface="Calibri"/>
-              </a:rPr>
-              <a:t>Exceptions fire live: any container whose window-average temperature rises above -15 C is flagged on the board within 10 seconds.</a:t>
-            </a:r>
-          </a:p>
-          <a:p>
-            <a:pPr>
-              <a:spcAft>
-                <a:spcPts val="800"/>
-              </a:spcAft>
-            </a:pPr>
-            <a:r>
-              <a:rPr sz="1500" b="0">
-                <a:solidFill>
-                  <a:srgbClr val="232A26"/>
-                </a:solidFill>
-                <a:latin typeface="Calibri"/>
-              </a:rPr>
-              <a:t>Health checks all green: depot relay online, queue reachable, Lambda deployed, and records archived climbing.</a:t>
-            </a:r>
-          </a:p>
-          <a:p>
-            <a:pPr>
-              <a:spcAft>
-                <a:spcPts val="800"/>
-              </a:spcAft>
-            </a:pPr>
-            <a:r>
-              <a:rPr sz="1500" b="0">
-                <a:solidFill>
-                  <a:srgbClr val="232A26"/>
-                </a:solidFill>
-                <a:latin typeface="Calibri"/>
-              </a:rPr>
-              <a:t>76 automated tests: unit and endpoint tests across 10 modules, run with pytest.</a:t>
-            </a:r>
-          </a:p>
-          <a:p>
-            <a:pPr>
-              <a:spcAft>
-                <a:spcPts val="800"/>
-              </a:spcAft>
-            </a:pPr>
-            <a:r>
-              <a:rPr sz="1500" b="0">
-                <a:solidFill>
-                  <a:srgbClr val="232A26"/>
-                </a:solidFill>
-                <a:latin typeface="Calibri"/>
-              </a:rPr>
-              <a:t>2,000-message burst absorbed: 32 parallel workers, batched 10 per SQS call, with live dashboard data untouched.</a:t>
-            </a:r>
-          </a:p>
-        </p:txBody>
-      </p:sp>
-      <p:sp>
-        <p:nvSpPr>
-          <p:cNvPr id="5" name="TextBox 4"/>
-          <p:cNvSpPr txBox="1"/>
-          <p:nvPr/>
-        </p:nvSpPr>
-        <p:spPr>
-          <a:xfrm>
-            <a:off x="0" y="320040"/>
-            <a:ext cx="1051560" cy="914400"/>
-          </a:xfrm>
-          <a:prstGeom prst="rect">
-            <a:avLst/>
-          </a:prstGeom>
-          <a:noFill/>
-        </p:spPr>
-        <p:txBody>
-          <a:bodyPr wrap="square" anchor="t">
-            <a:spAutoFit/>
-          </a:bodyPr>
-          <a:lstStyle/>
-          <a:p>
-            <a:pPr algn="ctr"/>
-            <a:r>
-              <a:rPr sz="2600" b="1" i="0">
-                <a:solidFill>
-                  <a:srgbClr val="FFFFFF"/>
-                </a:solidFill>
-                <a:latin typeface="Franklin Gothic Medium"/>
-              </a:rPr>
-              <a:t>3</a:t>
-            </a:r>
-          </a:p>
-        </p:txBody>
-      </p:sp>
-      <p:sp>
-        <p:nvSpPr>
-          <p:cNvPr id="6" name="Rectangle 5"/>
+          <p:cNvPr id="5" name="Rectangle 4"/>
           <p:cNvSpPr/>
           <p:nvPr/>
         </p:nvSpPr>
         <p:spPr>
           <a:xfrm>
-            <a:off x="1389888" y="1325880"/>
-            <a:ext cx="2926080" cy="36576"/>
+            <a:off x="457200" y="457200"/>
+            <a:ext cx="50292" cy="1325880"/>
           </a:xfrm>
           <a:prstGeom prst="rect">
             <a:avLst/>
           </a:prstGeom>
           <a:solidFill>
-            <a:srgbClr val="1F6FC0"/>
+            <a:srgbClr val="2A7FB0"/>
           </a:solidFill>
           <a:ln>
             <a:noFill/>
@@ -4193,9 +4220,97 @@
           </a:p>
         </p:txBody>
       </p:sp>
+      <p:sp>
+        <p:nvSpPr>
+          <p:cNvPr id="6" name="Rectangle 5"/>
+          <p:cNvSpPr/>
+          <p:nvPr/>
+        </p:nvSpPr>
+        <p:spPr>
+          <a:xfrm>
+            <a:off x="9445752" y="6355080"/>
+            <a:ext cx="2286000" cy="50292"/>
+          </a:xfrm>
+          <a:prstGeom prst="rect">
+            <a:avLst/>
+          </a:prstGeom>
+          <a:solidFill>
+            <a:srgbClr val="2A7FB0"/>
+          </a:solidFill>
+          <a:ln>
+            <a:noFill/>
+          </a:ln>
+          <a:effectLst/>
+        </p:spPr>
+        <p:style>
+          <a:lnRef idx="1">
+            <a:schemeClr val="accent1"/>
+          </a:lnRef>
+          <a:fillRef idx="3">
+            <a:schemeClr val="accent1"/>
+          </a:fillRef>
+          <a:effectRef idx="2">
+            <a:schemeClr val="accent1"/>
+          </a:effectRef>
+          <a:fontRef idx="minor">
+            <a:schemeClr val="lt1"/>
+          </a:fontRef>
+        </p:style>
+        <p:txBody>
+          <a:bodyPr rtlCol="0" anchor="ctr"/>
+          <a:lstStyle/>
+          <a:p>
+            <a:pPr algn="ctr"/>
+          </a:p>
+        </p:txBody>
+      </p:sp>
+      <p:sp>
+        <p:nvSpPr>
+          <p:cNvPr id="7" name="Rectangle 6"/>
+          <p:cNvSpPr/>
+          <p:nvPr/>
+        </p:nvSpPr>
+        <p:spPr>
+          <a:xfrm>
+            <a:off x="11686032" y="5074920"/>
+            <a:ext cx="50292" cy="1325880"/>
+          </a:xfrm>
+          <a:prstGeom prst="rect">
+            <a:avLst/>
+          </a:prstGeom>
+          <a:solidFill>
+            <a:srgbClr val="2A7FB0"/>
+          </a:solidFill>
+          <a:ln>
+            <a:noFill/>
+          </a:ln>
+          <a:effectLst/>
+        </p:spPr>
+        <p:style>
+          <a:lnRef idx="1">
+            <a:schemeClr val="accent1"/>
+          </a:lnRef>
+          <a:fillRef idx="3">
+            <a:schemeClr val="accent1"/>
+          </a:fillRef>
+          <a:effectRef idx="2">
+            <a:schemeClr val="accent1"/>
+          </a:effectRef>
+          <a:fontRef idx="minor">
+            <a:schemeClr val="lt1"/>
+          </a:fontRef>
+        </p:style>
+        <p:txBody>
+          <a:bodyPr rtlCol="0" anchor="ctr"/>
+          <a:lstStyle/>
+          <a:p>
+            <a:pPr algn="ctr"/>
+          </a:p>
+        </p:txBody>
+      </p:sp>
       <p:pic>
         <p:nvPicPr>
-          <p:cNvPr id="7" name="Picture 6" descr="dashboard-desktop.png"/>
+          <p:cNvPr id="8" name="Picture 7" descr="dashboard-desktop.png"/>
           <p:cNvPicPr>
             <a:picLocks noChangeAspect="1"/>
           </p:cNvPicPr>
@@ -4209,8 +4324,8 @@
         </p:blipFill>
         <p:spPr>
           <a:xfrm>
-            <a:off x="6858000" y="2044541"/>
-            <a:ext cx="4480560" cy="3500437"/>
+            <a:off x="6675120" y="1975246"/>
+            <a:ext cx="4892040" cy="3821906"/>
           </a:xfrm>
           <a:prstGeom prst="rect">
             <a:avLst/>
@@ -4237,20 +4352,204 @@
       <p:grpSpPr/>
       <p:sp>
         <p:nvSpPr>
+          <p:cNvPr id="2" name="Title 1"/>
+          <p:cNvSpPr>
+            <a:spLocks noGrp="1"/>
+          </p:cNvSpPr>
+          <p:nvPr>
+            <p:ph type="title"/>
+          </p:nvPr>
+        </p:nvSpPr>
+        <p:spPr>
+          <a:xfrm>
+            <a:off x="713232" y="731520"/>
+            <a:ext cx="10698480" cy="868680"/>
+          </a:xfrm>
+        </p:spPr>
+        <p:txBody>
+          <a:bodyPr wrap="square" anchor="t"/>
+          <a:lstStyle/>
+          <a:p>
+            <a:pPr algn="l"/>
+            <a:r>
+              <a:rPr b="1" sz="2400">
+                <a:solidFill>
+                  <a:srgbClr val="2A7FB0"/>
+                </a:solidFill>
+                <a:latin typeface="Cambria"/>
+              </a:rPr>
+              <a:t>Hardest part: a counter that lied at scale</a:t>
+            </a:r>
+          </a:p>
+        </p:txBody>
+      </p:sp>
+      <p:sp>
+        <p:nvSpPr>
+          <p:cNvPr id="3" name="Content Placeholder 2"/>
+          <p:cNvSpPr>
+            <a:spLocks noGrp="1"/>
+          </p:cNvSpPr>
+          <p:nvPr>
+            <p:ph idx="1"/>
+          </p:nvPr>
+        </p:nvSpPr>
+        <p:spPr>
+          <a:xfrm>
+            <a:off x="713232" y="1737360"/>
+            <a:ext cx="10698480" cy="4526280"/>
+          </a:xfrm>
+        </p:spPr>
+        <p:txBody>
+          <a:bodyPr wrap="square">
+            <a:normAutofit/>
+          </a:bodyPr>
+          <a:lstStyle/>
+          <a:p>
+            <a:pPr>
+              <a:spcAft>
+                <a:spcPts val="600"/>
+              </a:spcAft>
+            </a:pPr>
+            <a:r>
+              <a:rPr sz="1500" b="0">
+                <a:solidFill>
+                  <a:srgbClr val="232A26"/>
+                </a:solidFill>
+                <a:latin typeface="Calibri"/>
+              </a:rPr>
+              <a:t>The problem</a:t>
+            </a:r>
+          </a:p>
+          <a:p>
+            <a:pPr lvl="1">
+              <a:spcAft>
+                <a:spcPts val="600"/>
+              </a:spcAft>
+            </a:pPr>
+            <a:r>
+              <a:rPr sz="1300" b="0">
+                <a:solidFill>
+                  <a:srgbClr val="232A26"/>
+                </a:solidFill>
+                <a:latin typeface="Calibri"/>
+              </a:rPr>
+              <a:t>The dashboard's records-archived counter used a single DynamoDB Scan to count the table. DynamoDB answers with at most about 1 MB per call, so the counter only ever saw the first page of the table.</a:t>
+            </a:r>
+          </a:p>
+          <a:p>
+            <a:pPr>
+              <a:spcAft>
+                <a:spcPts val="600"/>
+              </a:spcAft>
+            </a:pPr>
+            <a:r>
+              <a:rPr sz="1500" b="0">
+                <a:solidFill>
+                  <a:srgbClr val="232A26"/>
+                </a:solidFill>
+                <a:latin typeface="Calibri"/>
+              </a:rPr>
+              <a:t>Why it was hard</a:t>
+            </a:r>
+          </a:p>
+          <a:p>
+            <a:pPr lvl="1">
+              <a:spcAft>
+                <a:spcPts val="600"/>
+              </a:spcAft>
+            </a:pPr>
+            <a:r>
+              <a:rPr sz="1300" b="0">
+                <a:solidFill>
+                  <a:srgbClr val="232A26"/>
+                </a:solidFill>
+                <a:latin typeface="Calibri"/>
+              </a:rPr>
+              <a:t>Nothing failed: the call succeeds and the number looks plausible. Every test passed, because small test tables fit inside one page. The undercount only appears once real data outgrows a page, and then it is completely silent.</a:t>
+            </a:r>
+          </a:p>
+          <a:p>
+            <a:pPr>
+              <a:spcAft>
+                <a:spcPts val="600"/>
+              </a:spcAft>
+            </a:pPr>
+            <a:r>
+              <a:rPr sz="1500" b="0">
+                <a:solidFill>
+                  <a:srgbClr val="232A26"/>
+                </a:solidFill>
+                <a:latin typeface="Calibri"/>
+              </a:rPr>
+              <a:t>How it was solved</a:t>
+            </a:r>
+          </a:p>
+          <a:p>
+            <a:pPr lvl="1">
+              <a:spcAft>
+                <a:spcPts val="600"/>
+              </a:spcAft>
+            </a:pPr>
+            <a:r>
+              <a:rPr sz="1300" b="0">
+                <a:solidFill>
+                  <a:srgbClr val="232A26"/>
+                </a:solidFill>
+                <a:latin typeface="Calibri"/>
+              </a:rPr>
+              <a:t>Follow the paging contract: keep requesting pages through DynamoDB's continuation key until none is left, and sum the per-page counts. New regression tests prove a multi-page table now counts in full.</a:t>
+            </a:r>
+          </a:p>
+          <a:p>
+            <a:pPr>
+              <a:spcAft>
+                <a:spcPts val="600"/>
+              </a:spcAft>
+            </a:pPr>
+            <a:r>
+              <a:rPr sz="1500" b="0">
+                <a:solidFill>
+                  <a:srgbClr val="232A26"/>
+                </a:solidFill>
+                <a:latin typeface="Calibri"/>
+              </a:rPr>
+              <a:t>Before: one call, first page only, so page 1 was counted while pages 2 and 3 were missed.</a:t>
+            </a:r>
+          </a:p>
+          <a:p>
+            <a:pPr>
+              <a:spcAft>
+                <a:spcPts val="600"/>
+              </a:spcAft>
+            </a:pPr>
+            <a:r>
+              <a:rPr sz="1500" b="0">
+                <a:solidFill>
+                  <a:srgbClr val="232A26"/>
+                </a:solidFill>
+                <a:latin typeface="Calibri"/>
+              </a:rPr>
+              <a:t>After: every page is walked and the per-page counts are summed, so pages 1, 2, and 3 are all counted.</a:t>
+            </a:r>
+          </a:p>
+        </p:txBody>
+      </p:sp>
+      <p:sp>
+        <p:nvSpPr>
           <p:cNvPr id="4" name="Rectangle 3"/>
           <p:cNvSpPr/>
           <p:nvPr/>
         </p:nvSpPr>
         <p:spPr>
           <a:xfrm>
-            <a:off x="0" y="0"/>
-            <a:ext cx="1051560" cy="6858000"/>
+            <a:off x="457200" y="457200"/>
+            <a:ext cx="2286000" cy="50292"/>
           </a:xfrm>
           <a:prstGeom prst="rect">
             <a:avLst/>
           </a:prstGeom>
           <a:solidFill>
-            <a:srgbClr val="1F6FC0"/>
+            <a:srgbClr val="2A7FB0"/>
           </a:solidFill>
           <a:ln>
             <a:noFill/>
@@ -4281,239 +4580,108 @@
       </p:sp>
       <p:sp>
         <p:nvSpPr>
-          <p:cNvPr id="2" name="Title 1"/>
-          <p:cNvSpPr>
-            <a:spLocks noGrp="1"/>
-          </p:cNvSpPr>
-          <p:nvPr>
-            <p:ph type="title"/>
-          </p:nvPr>
-        </p:nvSpPr>
-        <p:spPr>
-          <a:xfrm>
-            <a:off x="1371600" y="457200"/>
-            <a:ext cx="9311335" cy="868680"/>
-          </a:xfrm>
-        </p:spPr>
-        <p:txBody>
-          <a:bodyPr wrap="square" anchor="t"/>
-          <a:lstStyle/>
-          <a:p>
-            <a:pPr algn="l"/>
-            <a:r>
-              <a:rPr b="1" sz="2400">
-                <a:solidFill>
-                  <a:srgbClr val="1F6FC0"/>
-                </a:solidFill>
-                <a:latin typeface="Franklin Gothic Medium"/>
-              </a:rPr>
-              <a:t>Hardest part: a counter that lied at scale</a:t>
-            </a:r>
-          </a:p>
-        </p:txBody>
-      </p:sp>
-      <p:sp>
-        <p:nvSpPr>
-          <p:cNvPr id="3" name="Content Placeholder 2"/>
-          <p:cNvSpPr>
-            <a:spLocks noGrp="1"/>
-          </p:cNvSpPr>
-          <p:nvPr>
-            <p:ph idx="1"/>
-          </p:nvPr>
-        </p:nvSpPr>
-        <p:spPr>
-          <a:xfrm>
-            <a:off x="1389888" y="1508760"/>
-            <a:ext cx="9402775" cy="4846320"/>
-          </a:xfrm>
-        </p:spPr>
-        <p:txBody>
-          <a:bodyPr wrap="square">
-            <a:normAutofit/>
-          </a:bodyPr>
-          <a:lstStyle/>
-          <a:p>
-            <a:pPr>
-              <a:spcAft>
-                <a:spcPts val="600"/>
-              </a:spcAft>
-            </a:pPr>
-            <a:r>
-              <a:rPr sz="1500" b="1">
-                <a:solidFill>
-                  <a:srgbClr val="1F6FC0"/>
-                </a:solidFill>
-                <a:latin typeface="Calibri"/>
-              </a:rPr>
-              <a:t>The problem</a:t>
-            </a:r>
-          </a:p>
-          <a:p>
-            <a:pPr lvl="1">
-              <a:spcAft>
-                <a:spcPts val="600"/>
-              </a:spcAft>
-            </a:pPr>
-            <a:r>
-              <a:rPr sz="1300" b="0">
-                <a:solidFill>
-                  <a:srgbClr val="232A26"/>
-                </a:solidFill>
-                <a:latin typeface="Calibri"/>
-              </a:rPr>
-              <a:t>The dashboard's records-archived counter used a single DynamoDB Scan to count the table. DynamoDB answers with at most about 1 MB per call, so the counter only ever saw the first page of the table.</a:t>
-            </a:r>
-          </a:p>
-          <a:p>
-            <a:pPr>
-              <a:spcAft>
-                <a:spcPts val="600"/>
-              </a:spcAft>
-            </a:pPr>
-            <a:r>
-              <a:rPr sz="1500" b="1">
-                <a:solidFill>
-                  <a:srgbClr val="1F6FC0"/>
-                </a:solidFill>
-                <a:latin typeface="Calibri"/>
-              </a:rPr>
-              <a:t>Why it was hard</a:t>
-            </a:r>
-          </a:p>
-          <a:p>
-            <a:pPr lvl="1">
-              <a:spcAft>
-                <a:spcPts val="600"/>
-              </a:spcAft>
-            </a:pPr>
-            <a:r>
-              <a:rPr sz="1300" b="0">
-                <a:solidFill>
-                  <a:srgbClr val="232A26"/>
-                </a:solidFill>
-                <a:latin typeface="Calibri"/>
-              </a:rPr>
-              <a:t>Nothing failed: the call succeeds and the number looks plausible. Every test passed, because small test tables fit inside one page. The undercount only appears once real data outgrows a page, and then it is completely silent.</a:t>
-            </a:r>
-          </a:p>
-          <a:p>
-            <a:pPr>
-              <a:spcAft>
-                <a:spcPts val="600"/>
-              </a:spcAft>
-            </a:pPr>
-            <a:r>
-              <a:rPr sz="1500" b="1">
-                <a:solidFill>
-                  <a:srgbClr val="1F6FC0"/>
-                </a:solidFill>
-                <a:latin typeface="Calibri"/>
-              </a:rPr>
-              <a:t>How it was solved</a:t>
-            </a:r>
-          </a:p>
-          <a:p>
-            <a:pPr lvl="1">
-              <a:spcAft>
-                <a:spcPts val="600"/>
-              </a:spcAft>
-            </a:pPr>
-            <a:r>
-              <a:rPr sz="1300" b="0">
-                <a:solidFill>
-                  <a:srgbClr val="232A26"/>
-                </a:solidFill>
-                <a:latin typeface="Calibri"/>
-              </a:rPr>
-              <a:t>Follow the paging contract: keep requesting pages through DynamoDB's continuation key until none is left, and sum the per-page counts. New regression tests prove a multi-page table now counts in full.</a:t>
-            </a:r>
-          </a:p>
-          <a:p>
-            <a:pPr>
-              <a:spcAft>
-                <a:spcPts val="600"/>
-              </a:spcAft>
-            </a:pPr>
-            <a:r>
-              <a:rPr sz="1500" b="0">
-                <a:solidFill>
-                  <a:srgbClr val="232A26"/>
-                </a:solidFill>
-                <a:latin typeface="Calibri"/>
-              </a:rPr>
-              <a:t>Before: one call, first page only, so page 1 was counted while pages 2 and 3 were missed.</a:t>
-            </a:r>
-          </a:p>
-          <a:p>
-            <a:pPr>
-              <a:spcAft>
-                <a:spcPts val="600"/>
-              </a:spcAft>
-            </a:pPr>
-            <a:r>
-              <a:rPr sz="1500" b="0">
-                <a:solidFill>
-                  <a:srgbClr val="232A26"/>
-                </a:solidFill>
-                <a:latin typeface="Calibri"/>
-              </a:rPr>
-              <a:t>After: every page is walked and the per-page counts are summed, so pages 1, 2, and 3 are all counted.</a:t>
-            </a:r>
-          </a:p>
-        </p:txBody>
-      </p:sp>
-      <p:sp>
-        <p:nvSpPr>
-          <p:cNvPr id="5" name="TextBox 4"/>
-          <p:cNvSpPr txBox="1"/>
-          <p:nvPr/>
-        </p:nvSpPr>
-        <p:spPr>
-          <a:xfrm>
-            <a:off x="0" y="320040"/>
-            <a:ext cx="1051560" cy="914400"/>
-          </a:xfrm>
-          <a:prstGeom prst="rect">
-            <a:avLst/>
-          </a:prstGeom>
-          <a:noFill/>
-        </p:spPr>
-        <p:txBody>
-          <a:bodyPr wrap="square" anchor="t">
-            <a:spAutoFit/>
-          </a:bodyPr>
-          <a:lstStyle/>
-          <a:p>
-            <a:pPr algn="ctr"/>
-            <a:r>
-              <a:rPr sz="2600" b="1" i="0">
-                <a:solidFill>
-                  <a:srgbClr val="FFFFFF"/>
-                </a:solidFill>
-                <a:latin typeface="Franklin Gothic Medium"/>
-              </a:rPr>
-              <a:t>4</a:t>
-            </a:r>
-          </a:p>
-        </p:txBody>
-      </p:sp>
-      <p:sp>
-        <p:nvSpPr>
-          <p:cNvPr id="6" name="Rectangle 5"/>
+          <p:cNvPr id="5" name="Rectangle 4"/>
           <p:cNvSpPr/>
           <p:nvPr/>
         </p:nvSpPr>
         <p:spPr>
           <a:xfrm>
-            <a:off x="1389888" y="1325880"/>
-            <a:ext cx="2926080" cy="36576"/>
+            <a:off x="457200" y="457200"/>
+            <a:ext cx="50292" cy="1325880"/>
           </a:xfrm>
           <a:prstGeom prst="rect">
             <a:avLst/>
           </a:prstGeom>
           <a:solidFill>
-            <a:srgbClr val="1F6FC0"/>
+            <a:srgbClr val="2A7FB0"/>
+          </a:solidFill>
+          <a:ln>
+            <a:noFill/>
+          </a:ln>
+          <a:effectLst/>
+        </p:spPr>
+        <p:style>
+          <a:lnRef idx="1">
+            <a:schemeClr val="accent1"/>
+          </a:lnRef>
+          <a:fillRef idx="3">
+            <a:schemeClr val="accent1"/>
+          </a:fillRef>
+          <a:effectRef idx="2">
+            <a:schemeClr val="accent1"/>
+          </a:effectRef>
+          <a:fontRef idx="minor">
+            <a:schemeClr val="lt1"/>
+          </a:fontRef>
+        </p:style>
+        <p:txBody>
+          <a:bodyPr rtlCol="0" anchor="ctr"/>
+          <a:lstStyle/>
+          <a:p>
+            <a:pPr algn="ctr"/>
+          </a:p>
+        </p:txBody>
+      </p:sp>
+      <p:sp>
+        <p:nvSpPr>
+          <p:cNvPr id="6" name="Rectangle 5"/>
+          <p:cNvSpPr/>
+          <p:nvPr/>
+        </p:nvSpPr>
+        <p:spPr>
+          <a:xfrm>
+            <a:off x="9445752" y="6355080"/>
+            <a:ext cx="2286000" cy="50292"/>
+          </a:xfrm>
+          <a:prstGeom prst="rect">
+            <a:avLst/>
+          </a:prstGeom>
+          <a:solidFill>
+            <a:srgbClr val="2A7FB0"/>
+          </a:solidFill>
+          <a:ln>
+            <a:noFill/>
+          </a:ln>
+          <a:effectLst/>
+        </p:spPr>
+        <p:style>
+          <a:lnRef idx="1">
+            <a:schemeClr val="accent1"/>
+          </a:lnRef>
+          <a:fillRef idx="3">
+            <a:schemeClr val="accent1"/>
+          </a:fillRef>
+          <a:effectRef idx="2">
+            <a:schemeClr val="accent1"/>
+          </a:effectRef>
+          <a:fontRef idx="minor">
+            <a:schemeClr val="lt1"/>
+          </a:fontRef>
+        </p:style>
+        <p:txBody>
+          <a:bodyPr rtlCol="0" anchor="ctr"/>
+          <a:lstStyle/>
+          <a:p>
+            <a:pPr algn="ctr"/>
+          </a:p>
+        </p:txBody>
+      </p:sp>
+      <p:sp>
+        <p:nvSpPr>
+          <p:cNvPr id="7" name="Rectangle 6"/>
+          <p:cNvSpPr/>
+          <p:nvPr/>
+        </p:nvSpPr>
+        <p:spPr>
+          <a:xfrm>
+            <a:off x="11686032" y="5074920"/>
+            <a:ext cx="50292" cy="1325880"/>
+          </a:xfrm>
+          <a:prstGeom prst="rect">
+            <a:avLst/>
+          </a:prstGeom>
+          <a:solidFill>
+            <a:srgbClr val="2A7FB0"/>
           </a:solidFill>
           <a:ln>
             <a:noFill/>
@@ -4562,20 +4730,140 @@
       <p:grpSpPr/>
       <p:sp>
         <p:nvSpPr>
+          <p:cNvPr id="2" name="Title 1"/>
+          <p:cNvSpPr>
+            <a:spLocks noGrp="1"/>
+          </p:cNvSpPr>
+          <p:nvPr>
+            <p:ph type="title"/>
+          </p:nvPr>
+        </p:nvSpPr>
+        <p:spPr>
+          <a:xfrm>
+            <a:off x="713232" y="731520"/>
+            <a:ext cx="10698480" cy="868680"/>
+          </a:xfrm>
+        </p:spPr>
+        <p:txBody>
+          <a:bodyPr wrap="square" anchor="t"/>
+          <a:lstStyle/>
+          <a:p>
+            <a:pPr algn="l"/>
+            <a:r>
+              <a:rPr b="1" sz="2700">
+                <a:solidFill>
+                  <a:srgbClr val="2A7FB0"/>
+                </a:solidFill>
+                <a:latin typeface="Cambria"/>
+              </a:rPr>
+              <a:t>Takeaways</a:t>
+            </a:r>
+          </a:p>
+        </p:txBody>
+      </p:sp>
+      <p:sp>
+        <p:nvSpPr>
+          <p:cNvPr id="3" name="Content Placeholder 2"/>
+          <p:cNvSpPr>
+            <a:spLocks noGrp="1"/>
+          </p:cNvSpPr>
+          <p:nvPr>
+            <p:ph idx="1"/>
+          </p:nvPr>
+        </p:nvSpPr>
+        <p:spPr>
+          <a:xfrm>
+            <a:off x="713232" y="1737360"/>
+            <a:ext cx="10698480" cy="4526280"/>
+          </a:xfrm>
+        </p:spPr>
+        <p:txBody>
+          <a:bodyPr wrap="square">
+            <a:normAutofit/>
+          </a:bodyPr>
+          <a:lstStyle/>
+          <a:p>
+            <a:pPr>
+              <a:spcAft>
+                <a:spcPts val="900"/>
+              </a:spcAft>
+            </a:pPr>
+            <a:r>
+              <a:rPr sz="1700" b="0">
+                <a:solidFill>
+                  <a:srgbClr val="232A26"/>
+                </a:solidFill>
+                <a:latin typeface="Calibri"/>
+              </a:rPr>
+              <a:t>Decide at the edge: exceptions are flagged at the depot relay within a 10-second window, with no cloud round-trip in the alert path.</a:t>
+            </a:r>
+          </a:p>
+          <a:p>
+            <a:pPr>
+              <a:spcAft>
+                <a:spcPts val="900"/>
+              </a:spcAft>
+            </a:pPr>
+            <a:r>
+              <a:rPr sz="1700" b="0">
+                <a:solidFill>
+                  <a:srgbClr val="232A26"/>
+                </a:solidFill>
+                <a:latin typeface="Calibri"/>
+              </a:rPr>
+              <a:t>Serverless scales by configuration: the queue, function and store absorbed a 2,000-message burst unchanged, and moving to real AWS is configuration plus one scripted deploy, not a rewrite.</a:t>
+            </a:r>
+          </a:p>
+          <a:p>
+            <a:pPr>
+              <a:spcAft>
+                <a:spcPts val="900"/>
+              </a:spcAft>
+            </a:pPr>
+            <a:r>
+              <a:rPr sz="1700" b="0">
+                <a:solidFill>
+                  <a:srgbClr val="232A26"/>
+                </a:solidFill>
+                <a:latin typeface="Calibri"/>
+              </a:rPr>
+              <a:t>Green tests are not proof at scale: a silent paging undercount passed every test, and the audit and its new regression tests are what made the archive count trustworthy.</a:t>
+            </a:r>
+          </a:p>
+          <a:p>
+            <a:pPr>
+              <a:spcAft>
+                <a:spcPts val="900"/>
+              </a:spcAft>
+            </a:pPr>
+            <a:r>
+              <a:rPr sz="1700" b="0">
+                <a:solidFill>
+                  <a:srgbClr val="232A26"/>
+                </a:solidFill>
+                <a:latin typeface="Calibri"/>
+              </a:rPr>
+              <a:t>Thank you. Questions?</a:t>
+            </a:r>
+          </a:p>
+        </p:txBody>
+      </p:sp>
+      <p:sp>
+        <p:nvSpPr>
           <p:cNvPr id="4" name="Rectangle 3"/>
           <p:cNvSpPr/>
           <p:nvPr/>
         </p:nvSpPr>
         <p:spPr>
           <a:xfrm>
-            <a:off x="0" y="0"/>
-            <a:ext cx="1051560" cy="6858000"/>
+            <a:off x="457200" y="457200"/>
+            <a:ext cx="2286000" cy="50292"/>
           </a:xfrm>
           <a:prstGeom prst="rect">
             <a:avLst/>
           </a:prstGeom>
           <a:solidFill>
-            <a:srgbClr val="1F6FC0"/>
+            <a:srgbClr val="2A7FB0"/>
           </a:solidFill>
           <a:ln>
             <a:noFill/>
@@ -4606,175 +4894,108 @@
       </p:sp>
       <p:sp>
         <p:nvSpPr>
-          <p:cNvPr id="2" name="Title 1"/>
-          <p:cNvSpPr>
-            <a:spLocks noGrp="1"/>
-          </p:cNvSpPr>
-          <p:nvPr>
-            <p:ph type="title"/>
-          </p:nvPr>
-        </p:nvSpPr>
-        <p:spPr>
-          <a:xfrm>
-            <a:off x="1371600" y="457200"/>
-            <a:ext cx="9311335" cy="868680"/>
-          </a:xfrm>
-        </p:spPr>
-        <p:txBody>
-          <a:bodyPr wrap="square" anchor="t"/>
-          <a:lstStyle/>
-          <a:p>
-            <a:pPr algn="l"/>
-            <a:r>
-              <a:rPr b="1" sz="2700">
-                <a:solidFill>
-                  <a:srgbClr val="1F6FC0"/>
-                </a:solidFill>
-                <a:latin typeface="Franklin Gothic Medium"/>
-              </a:rPr>
-              <a:t>Takeaways</a:t>
-            </a:r>
-          </a:p>
-        </p:txBody>
-      </p:sp>
-      <p:sp>
-        <p:nvSpPr>
-          <p:cNvPr id="3" name="Content Placeholder 2"/>
-          <p:cNvSpPr>
-            <a:spLocks noGrp="1"/>
-          </p:cNvSpPr>
-          <p:nvPr>
-            <p:ph idx="1"/>
-          </p:nvPr>
-        </p:nvSpPr>
-        <p:spPr>
-          <a:xfrm>
-            <a:off x="1389888" y="1508760"/>
-            <a:ext cx="9402775" cy="4846320"/>
-          </a:xfrm>
-        </p:spPr>
-        <p:txBody>
-          <a:bodyPr wrap="square">
-            <a:normAutofit/>
-          </a:bodyPr>
-          <a:lstStyle/>
-          <a:p>
-            <a:pPr>
-              <a:spcAft>
-                <a:spcPts val="900"/>
-              </a:spcAft>
-            </a:pPr>
-            <a:r>
-              <a:rPr sz="1700" b="1">
-                <a:solidFill>
-                  <a:srgbClr val="1F6FC0"/>
-                </a:solidFill>
-                <a:latin typeface="Calibri"/>
-              </a:rPr>
-              <a:t>Decide at the edge: exceptions are flagged at the depot relay within a 10-second window, with no cloud round-trip in the alert path.</a:t>
-            </a:r>
-          </a:p>
-          <a:p>
-            <a:pPr>
-              <a:spcAft>
-                <a:spcPts val="900"/>
-              </a:spcAft>
-            </a:pPr>
-            <a:r>
-              <a:rPr sz="1700" b="0">
-                <a:solidFill>
-                  <a:srgbClr val="232A26"/>
-                </a:solidFill>
-                <a:latin typeface="Calibri"/>
-              </a:rPr>
-              <a:t>Serverless scales by configuration: the queue, function and store absorbed a 2,000-message burst unchanged, and moving to real AWS is configuration plus one scripted deploy, not a rewrite.</a:t>
-            </a:r>
-          </a:p>
-          <a:p>
-            <a:pPr>
-              <a:spcAft>
-                <a:spcPts val="900"/>
-              </a:spcAft>
-            </a:pPr>
-            <a:r>
-              <a:rPr sz="1700" b="0">
-                <a:solidFill>
-                  <a:srgbClr val="232A26"/>
-                </a:solidFill>
-                <a:latin typeface="Calibri"/>
-              </a:rPr>
-              <a:t>Green tests are not proof at scale: a silent paging undercount passed every test, and the audit and its new regression tests are what made the archive count trustworthy.</a:t>
-            </a:r>
-          </a:p>
-          <a:p>
-            <a:pPr>
-              <a:spcAft>
-                <a:spcPts val="900"/>
-              </a:spcAft>
-            </a:pPr>
-            <a:r>
-              <a:rPr sz="1700" b="0">
-                <a:solidFill>
-                  <a:srgbClr val="232A26"/>
-                </a:solidFill>
-                <a:latin typeface="Calibri"/>
-              </a:rPr>
-              <a:t>Thank you. Questions?</a:t>
-            </a:r>
-          </a:p>
-        </p:txBody>
-      </p:sp>
-      <p:sp>
-        <p:nvSpPr>
-          <p:cNvPr id="5" name="TextBox 4"/>
-          <p:cNvSpPr txBox="1"/>
-          <p:nvPr/>
-        </p:nvSpPr>
-        <p:spPr>
-          <a:xfrm>
-            <a:off x="0" y="320040"/>
-            <a:ext cx="1051560" cy="914400"/>
-          </a:xfrm>
-          <a:prstGeom prst="rect">
-            <a:avLst/>
-          </a:prstGeom>
-          <a:noFill/>
-        </p:spPr>
-        <p:txBody>
-          <a:bodyPr wrap="square" anchor="t">
-            <a:spAutoFit/>
-          </a:bodyPr>
-          <a:lstStyle/>
-          <a:p>
-            <a:pPr algn="ctr"/>
-            <a:r>
-              <a:rPr sz="2600" b="1" i="0">
-                <a:solidFill>
-                  <a:srgbClr val="FFFFFF"/>
-                </a:solidFill>
-                <a:latin typeface="Franklin Gothic Medium"/>
-              </a:rPr>
-              <a:t>5</a:t>
-            </a:r>
-          </a:p>
-        </p:txBody>
-      </p:sp>
-      <p:sp>
-        <p:nvSpPr>
-          <p:cNvPr id="6" name="Rectangle 5"/>
+          <p:cNvPr id="5" name="Rectangle 4"/>
           <p:cNvSpPr/>
           <p:nvPr/>
         </p:nvSpPr>
         <p:spPr>
           <a:xfrm>
-            <a:off x="1389888" y="1325880"/>
-            <a:ext cx="2926080" cy="36576"/>
+            <a:off x="457200" y="457200"/>
+            <a:ext cx="50292" cy="1325880"/>
           </a:xfrm>
           <a:prstGeom prst="rect">
             <a:avLst/>
           </a:prstGeom>
           <a:solidFill>
-            <a:srgbClr val="1F6FC0"/>
+            <a:srgbClr val="2A7FB0"/>
+          </a:solidFill>
+          <a:ln>
+            <a:noFill/>
+          </a:ln>
+          <a:effectLst/>
+        </p:spPr>
+        <p:style>
+          <a:lnRef idx="1">
+            <a:schemeClr val="accent1"/>
+          </a:lnRef>
+          <a:fillRef idx="3">
+            <a:schemeClr val="accent1"/>
+          </a:fillRef>
+          <a:effectRef idx="2">
+            <a:schemeClr val="accent1"/>
+          </a:effectRef>
+          <a:fontRef idx="minor">
+            <a:schemeClr val="lt1"/>
+          </a:fontRef>
+        </p:style>
+        <p:txBody>
+          <a:bodyPr rtlCol="0" anchor="ctr"/>
+          <a:lstStyle/>
+          <a:p>
+            <a:pPr algn="ctr"/>
+          </a:p>
+        </p:txBody>
+      </p:sp>
+      <p:sp>
+        <p:nvSpPr>
+          <p:cNvPr id="6" name="Rectangle 5"/>
+          <p:cNvSpPr/>
+          <p:nvPr/>
+        </p:nvSpPr>
+        <p:spPr>
+          <a:xfrm>
+            <a:off x="9445752" y="6355080"/>
+            <a:ext cx="2286000" cy="50292"/>
+          </a:xfrm>
+          <a:prstGeom prst="rect">
+            <a:avLst/>
+          </a:prstGeom>
+          <a:solidFill>
+            <a:srgbClr val="2A7FB0"/>
+          </a:solidFill>
+          <a:ln>
+            <a:noFill/>
+          </a:ln>
+          <a:effectLst/>
+        </p:spPr>
+        <p:style>
+          <a:lnRef idx="1">
+            <a:schemeClr val="accent1"/>
+          </a:lnRef>
+          <a:fillRef idx="3">
+            <a:schemeClr val="accent1"/>
+          </a:fillRef>
+          <a:effectRef idx="2">
+            <a:schemeClr val="accent1"/>
+          </a:effectRef>
+          <a:fontRef idx="minor">
+            <a:schemeClr val="lt1"/>
+          </a:fontRef>
+        </p:style>
+        <p:txBody>
+          <a:bodyPr rtlCol="0" anchor="ctr"/>
+          <a:lstStyle/>
+          <a:p>
+            <a:pPr algn="ctr"/>
+          </a:p>
+        </p:txBody>
+      </p:sp>
+      <p:sp>
+        <p:nvSpPr>
+          <p:cNvPr id="7" name="Rectangle 6"/>
+          <p:cNvSpPr/>
+          <p:nvPr/>
+        </p:nvSpPr>
+        <p:spPr>
+          <a:xfrm>
+            <a:off x="11686032" y="5074920"/>
+            <a:ext cx="50292" cy="1325880"/>
+          </a:xfrm>
+          <a:prstGeom prst="rect">
+            <a:avLst/>
+          </a:prstGeom>
+          <a:solidFill>
+            <a:srgbClr val="2A7FB0"/>
           </a:solidFill>
           <a:ln>
             <a:noFill/>
